--- a/examples/templates/synthetic.pptx
+++ b/examples/templates/synthetic.pptx
@@ -3,9 +3,17 @@
 <p:presentation xmlns:a="http://schemas.openxmlformats.org/drawingml/2006/main" xmlns:r="http://schemas.openxmlformats.org/officeDocument/2006/relationships" xmlns:p="http://schemas.openxmlformats.org/presentationml/2006/main" saveSubsetFonts="1" autoCompressPictures="0">
   <p:sldMasterIdLst>
     <p:sldMasterId id="2147483648" r:id="rId1"/>
+    <p:sldMasterId id="2147483660" r:id="rId7"/>
   </p:sldMasterIdLst>
   <p:sldIdLst>
-    <p:sldId id="256" r:id="rId7"/>
+    <p:sldId id="256" r:id="rId8"/>
+    <p:sldId id="257" r:id="rId9"/>
+    <p:sldId id="258" r:id="rId11"/>
+    <p:sldId id="259" r:id="rId12"/>
+    <p:sldId id="260" r:id="rId13"/>
+    <p:sldId id="261" r:id="rId14"/>
+    <p:sldId id="262" r:id="rId15"/>
+    <p:sldId id="263" r:id="rId16"/>
   </p:sldIdLst>
   <p:sldSz cx="12191695" cy="6858000" type="screen4x3"/>
   <p:notesSz cx="6858000" cy="9144000"/>
@@ -104,7 +112,1926 @@
       </a:defRPr>
     </a:lvl9pPr>
   </p:defaultTextStyle>
+  <p:extLst>
+    <p:ext uri="{521415D9-36F7-43E2-AB2F-B90AF26B5E84}">
+      <p14:sectionLst xmlns:p14="http://schemas.microsoft.com/office/powerpoint/2010/main">
+        <p14:section name="Титул" id="{D540F384-C2BA-5857-9161-5526D8B19F1B}">
+          <p14:sldIdLst>
+            <p14:sldId id="256"/>
+          </p14:sldIdLst>
+        </p14:section>
+        <p14:section name="Продажи" id="{F1B58A13-6EB0-5BC0-BF2B-6675FE4E0A28}">
+          <p14:sldIdLst>
+            <p14:sldId id="257"/>
+            <p14:sldId id="258"/>
+            <p14:sldId id="259"/>
+            <p14:sldId id="260"/>
+            <p14:sldId id="261"/>
+          </p14:sldIdLst>
+        </p14:section>
+        <p14:section name="Служебное" id="{BCF0BE2E-9212-5E5D-B149-792836DB928D}">
+          <p14:sldIdLst>
+            <p14:sldId id="262"/>
+            <p14:sldId id="263"/>
+          </p14:sldIdLst>
+        </p14:section>
+      </p14:sectionLst>
+    </p:ext>
+  </p:extLst>
 </p:presentation>
+</file>
+
+<file path=ppt/commentAuthors.xml><?xml version="1.0" encoding="utf-8"?>
+<ns0:cmAuthorLst xmlns:ns0="http://schemas.openxmlformats.org/presentationml/2006/main">
+  <ns0:cmAuthor id="0" name="Автор шаблона" initials="АШ" lastIdx="1" clrIdx="0"/>
+  <ns0:cmAuthor id="1" name="Дизайнер" initials="Д" lastIdx="1" clrIdx="1"/>
+</ns0:cmAuthorLst>
+</file>
+
+<file path=ppt/charts/chart1.xml><?xml version="1.0" encoding="utf-8"?>
+<c:chartSpace xmlns:c="http://schemas.openxmlformats.org/drawingml/2006/chart" xmlns:a="http://schemas.openxmlformats.org/drawingml/2006/main" xmlns:r="http://schemas.openxmlformats.org/officeDocument/2006/relationships">
+  <c:date1904 val="0"/>
+  <c:chart>
+    <c:autoTitleDeleted val="0"/>
+    <c:plotArea>
+      <c:barChart>
+        <c:barDir val="col"/>
+        <c:grouping val="stacked"/>
+        <c:ser>
+          <c:idx val="0"/>
+          <c:order val="0"/>
+          <c:tx>
+            <c:strRef>
+              <c:f>Sheet1!$B$1</c:f>
+              <c:strCache>
+                <c:ptCount val="1"/>
+                <c:pt idx="0">
+                  <c:v>Ряд 1</c:v>
+                </c:pt>
+              </c:strCache>
+            </c:strRef>
+          </c:tx>
+          <c:cat>
+            <c:strRef>
+              <c:f>Sheet1!$A$2:$A$4</c:f>
+              <c:strCache>
+                <c:ptCount val="3"/>
+                <c:pt idx="0">
+                  <c:v>Категория 1</c:v>
+                </c:pt>
+                <c:pt idx="1">
+                  <c:v>Категория 2</c:v>
+                </c:pt>
+                <c:pt idx="2">
+                  <c:v>Категория 3</c:v>
+                </c:pt>
+              </c:strCache>
+            </c:strRef>
+          </c:cat>
+          <c:val>
+            <c:numRef>
+              <c:f>Sheet1!$B$2:$B$4</c:f>
+              <c:numCache>
+                <c:formatCode>General</c:formatCode>
+                <c:ptCount val="3"/>
+                <c:pt idx="0">
+                  <c:v>2.0</c:v>
+                </c:pt>
+                <c:pt idx="1">
+                  <c:v>3.7</c:v>
+                </c:pt>
+                <c:pt idx="2">
+                  <c:v>5.4</c:v>
+                </c:pt>
+              </c:numCache>
+            </c:numRef>
+          </c:val>
+        </c:ser>
+        <c:ser>
+          <c:idx val="1"/>
+          <c:order val="1"/>
+          <c:tx>
+            <c:strRef>
+              <c:f>Sheet1!$C$1</c:f>
+              <c:strCache>
+                <c:ptCount val="1"/>
+                <c:pt idx="0">
+                  <c:v>Ряд 2</c:v>
+                </c:pt>
+              </c:strCache>
+            </c:strRef>
+          </c:tx>
+          <c:cat>
+            <c:strRef>
+              <c:f>Sheet1!$A$2:$A$4</c:f>
+              <c:strCache>
+                <c:ptCount val="3"/>
+                <c:pt idx="0">
+                  <c:v>Категория 1</c:v>
+                </c:pt>
+                <c:pt idx="1">
+                  <c:v>Категория 2</c:v>
+                </c:pt>
+                <c:pt idx="2">
+                  <c:v>Категория 3</c:v>
+                </c:pt>
+              </c:strCache>
+            </c:strRef>
+          </c:cat>
+          <c:val>
+            <c:numRef>
+              <c:f>Sheet1!$C$2:$C$4</c:f>
+              <c:numCache>
+                <c:formatCode>General</c:formatCode>
+                <c:ptCount val="3"/>
+                <c:pt idx="0">
+                  <c:v>3.7</c:v>
+                </c:pt>
+                <c:pt idx="1">
+                  <c:v>5.4</c:v>
+                </c:pt>
+                <c:pt idx="2">
+                  <c:v>3.1</c:v>
+                </c:pt>
+              </c:numCache>
+            </c:numRef>
+          </c:val>
+        </c:ser>
+        <c:dLbls>
+          <c:numFmt formatCode="#,##0.0" sourceLinked="0"/>
+          <c:txPr>
+            <a:bodyPr/>
+            <a:lstStyle/>
+            <a:p>
+              <a:pPr>
+                <a:defRPr sz="1100"/>
+              </a:pPr>
+            </a:p>
+          </c:txPr>
+          <c:showLegendKey val="0"/>
+          <c:showVal val="1"/>
+          <c:showCatName val="0"/>
+          <c:showSerName val="0"/>
+          <c:showPercent val="0"/>
+          <c:showBubbleSize val="0"/>
+          <c:showLeaderLines val="1"/>
+        </c:dLbls>
+        <c:overlap val="100"/>
+        <c:axId val="-2068027336"/>
+        <c:axId val="-2113994440"/>
+      </c:barChart>
+      <c:lineChart>
+        <c:grouping val="standard"/>
+        <c:varyColors val="0"/>
+        <c:ser>
+          <c:idx val="2"/>
+          <c:order val="2"/>
+          <c:tx>
+            <c:strRef>
+              <c:f>Sheet1!$D$1</c:f>
+              <c:strCache>
+                <c:ptCount val="1"/>
+                <c:pt idx="0">
+                  <c:v>Ряд 3</c:v>
+                </c:pt>
+              </c:strCache>
+            </c:strRef>
+          </c:tx>
+          <c:spPr>
+            <a:ln w="28575" cap="rnd">
+              <a:solidFill>
+                <a:schemeClr val="accent2"/>
+              </a:solidFill>
+            </a:ln>
+          </c:spPr>
+          <c:marker>
+            <c:symbol val="circle"/>
+            <c:size val="7"/>
+          </c:marker>
+          <c:cat>
+            <c:strRef>
+              <c:f>Sheet1!$A$2:$A$4</c:f>
+              <c:strCache>
+                <c:ptCount val="3"/>
+                <c:pt idx="0">
+                  <c:v>Категория 1</c:v>
+                </c:pt>
+                <c:pt idx="1">
+                  <c:v>Категория 2</c:v>
+                </c:pt>
+                <c:pt idx="2">
+                  <c:v>Категория 3</c:v>
+                </c:pt>
+              </c:strCache>
+            </c:strRef>
+          </c:cat>
+          <c:val>
+            <c:numRef>
+              <c:f>Sheet1!$D$2:$D$4</c:f>
+              <c:numCache>
+                <c:formatCode>General</c:formatCode>
+                <c:ptCount val="3"/>
+                <c:pt idx="0">
+                  <c:v>5.4</c:v>
+                </c:pt>
+                <c:pt idx="1">
+                  <c:v>3.1</c:v>
+                </c:pt>
+                <c:pt idx="2">
+                  <c:v>4.8</c:v>
+                </c:pt>
+              </c:numCache>
+            </c:numRef>
+          </c:val>
+          <c:smooth val="0"/>
+        </c:ser>
+        <c:dLbls>
+          <c:numFmt formatCode="0%" sourceLinked="0"/>
+          <c:spPr>
+            <a:noFill/>
+          </c:spPr>
+          <c:dLblPos val="t"/>
+          <c:showLegendKey val="0"/>
+          <c:showVal val="1"/>
+          <c:showCatName val="0"/>
+          <c:showSerName val="0"/>
+          <c:showPercent val="0"/>
+          <c:showBubbleSize val="0"/>
+        </c:dLbls>
+        <c:marker val="1"/>
+        <c:axId val="50010"/>
+        <c:axId val="50011"/>
+      </c:lineChart>
+      <c:catAx>
+        <c:axId val="-2068027336"/>
+        <c:scaling>
+          <c:orientation val="minMax"/>
+        </c:scaling>
+        <c:delete val="0"/>
+        <c:axPos val="b"/>
+        <c:majorTickMark val="out"/>
+        <c:minorTickMark val="none"/>
+        <c:tickLblPos val="nextTo"/>
+        <c:crossAx val="-2113994440"/>
+        <c:crosses val="autoZero"/>
+        <c:auto val="1"/>
+        <c:lblAlgn val="ctr"/>
+        <c:lblOffset val="100"/>
+        <c:noMultiLvlLbl val="0"/>
+      </c:catAx>
+      <c:valAx>
+        <c:axId val="-2113994440"/>
+        <c:scaling/>
+        <c:delete val="0"/>
+        <c:axPos val="l"/>
+        <c:majorGridlines/>
+        <c:majorTickMark val="out"/>
+        <c:minorTickMark val="none"/>
+        <c:tickLblPos val="nextTo"/>
+        <c:crossAx val="-2068027336"/>
+        <c:crosses val="autoZero"/>
+      </c:valAx>
+      <c:catAx>
+        <c:axId val="50010"/>
+        <c:scaling>
+          <c:orientation val="minMax"/>
+        </c:scaling>
+        <c:delete val="1"/>
+        <c:axPos val="b"/>
+        <c:majorTickMark val="none"/>
+        <c:minorTickMark val="none"/>
+        <c:tickLblPos val="nextTo"/>
+        <c:crossAx val="50011"/>
+        <c:crosses val="autoZero"/>
+        <c:auto val="1"/>
+        <c:lblAlgn val="ctr"/>
+        <c:lblOffset val="100"/>
+        <c:noMultiLvlLbl val="0"/>
+      </c:catAx>
+      <c:valAx>
+        <c:axId val="50011"/>
+        <c:scaling>
+          <c:orientation val="minMax"/>
+        </c:scaling>
+        <c:delete val="0"/>
+        <c:axPos val="r"/>
+        <c:numFmt formatCode="General" sourceLinked="1"/>
+        <c:majorTickMark val="none"/>
+        <c:minorTickMark val="none"/>
+        <c:tickLblPos val="nextTo"/>
+        <c:txPr>
+          <a:bodyPr/>
+          <a:lstStyle/>
+          <a:p>
+            <a:pPr>
+              <a:defRPr sz="900">
+                <a:solidFill>
+                  <a:srgbClr val="FFFFFF"/>
+                </a:solidFill>
+              </a:defRPr>
+            </a:pPr>
+            <a:endParaRPr lang="ru-RU"/>
+          </a:p>
+        </c:txPr>
+        <c:crossAx val="50010"/>
+        <c:crosses val="max"/>
+        <c:crossBetween val="between"/>
+      </c:valAx>
+    </c:plotArea>
+    <c:legend>
+      <c:legendPos val="b"/>
+      <c:overlay val="0"/>
+    </c:legend>
+    <c:dispBlanksAs val="gap"/>
+  </c:chart>
+  <c:txPr>
+    <a:bodyPr/>
+    <a:lstStyle/>
+    <a:p>
+      <a:pPr>
+        <a:defRPr sz="1100">
+          <a:latin typeface="Arial"/>
+        </a:defRPr>
+      </a:pPr>
+      <a:endParaRPr lang="en-US"/>
+    </a:p>
+  </c:txPr>
+  <c:externalData r:id="rId1">
+    <c:autoUpdate val="0"/>
+  </c:externalData>
+</c:chartSpace>
+</file>
+
+<file path=ppt/charts/chart2.xml><?xml version="1.0" encoding="utf-8"?>
+<c:chartSpace xmlns:c="http://schemas.openxmlformats.org/drawingml/2006/chart" xmlns:a="http://schemas.openxmlformats.org/drawingml/2006/main" xmlns:r="http://schemas.openxmlformats.org/officeDocument/2006/relationships">
+  <c:chart>
+    <c:autoTitleDeleted val="0"/>
+    <c:plotArea>
+      <c:pieChart>
+        <c:varyColors/>
+        <c:ser>
+          <c:idx val="0"/>
+          <c:order val="0"/>
+          <c:tx>
+            <c:strRef>
+              <c:f>Sheet1!$B$1</c:f>
+              <c:strCache>
+                <c:ptCount val="1"/>
+                <c:pt idx="0">
+                  <c:v>Ряд 1</c:v>
+                </c:pt>
+              </c:strCache>
+            </c:strRef>
+          </c:tx>
+          <c:dPt>
+            <c:idx val="0"/>
+            <c:spPr>
+              <a:solidFill>
+                <a:srgbClr val="1F4E79"/>
+              </a:solidFill>
+            </c:spPr>
+          </c:dPt>
+          <c:dPt>
+            <c:idx val="1"/>
+            <c:spPr>
+              <a:solidFill>
+                <a:srgbClr val="F28C28"/>
+              </a:solidFill>
+            </c:spPr>
+          </c:dPt>
+          <c:dPt>
+            <c:idx val="2"/>
+            <c:spPr>
+              <a:solidFill>
+                <a:srgbClr val="2E8B57"/>
+              </a:solidFill>
+            </c:spPr>
+          </c:dPt>
+          <c:dPt>
+            <c:idx val="3"/>
+            <c:spPr>
+              <a:solidFill>
+                <a:srgbClr val="7F7F7F"/>
+              </a:solidFill>
+            </c:spPr>
+          </c:dPt>
+          <c:dPt>
+            <c:idx val="4"/>
+            <c:spPr>
+              <a:solidFill>
+                <a:srgbClr val="5B9BD5"/>
+              </a:solidFill>
+            </c:spPr>
+          </c:dPt>
+          <c:dPt>
+            <c:idx val="5"/>
+            <c:spPr>
+              <a:solidFill>
+                <a:srgbClr val="C00000"/>
+              </a:solidFill>
+            </c:spPr>
+          </c:dPt>
+          <c:dLbls>
+            <c:dLbl>
+              <c:idx val="0"/>
+              <c:spPr/>
+              <c:txPr>
+                <a:bodyPr/>
+                <a:lstStyle/>
+                <a:p>
+                  <a:pPr>
+                    <a:defRPr/>
+                  </a:pPr>
+                </a:p>
+              </c:txPr>
+              <c:dLblPos val="outEnd"/>
+              <c:showLegendKey val="0"/>
+              <c:showVal val="1"/>
+              <c:showCatName val="0"/>
+              <c:showSerName val="0"/>
+              <c:showPercent val="0"/>
+              <c:showBubbleSize val="0"/>
+              <c:showLegendKey val="0"/>
+              <c:showVal val="0"/>
+              <c:showCatName val="1"/>
+              <c:showSerName val="0"/>
+              <c:showPercent val="1"/>
+              <c:showBubbleSize val="0"/>
+              <c:separator>; </c:separator>
+            </c:dLbl>
+            <c:dLbl>
+              <c:idx val="1"/>
+              <c:spPr/>
+              <c:txPr>
+                <a:bodyPr/>
+                <a:lstStyle/>
+                <a:p>
+                  <a:pPr>
+                    <a:defRPr/>
+                  </a:pPr>
+                </a:p>
+              </c:txPr>
+              <c:dLblPos val="outEnd"/>
+              <c:showLegendKey val="0"/>
+              <c:showVal val="1"/>
+              <c:showCatName val="0"/>
+              <c:showSerName val="0"/>
+              <c:showPercent val="0"/>
+              <c:showBubbleSize val="0"/>
+              <c:showLegendKey val="0"/>
+              <c:showVal val="0"/>
+              <c:showCatName val="1"/>
+              <c:showSerName val="0"/>
+              <c:showPercent val="1"/>
+              <c:showBubbleSize val="0"/>
+              <c:separator>; </c:separator>
+            </c:dLbl>
+            <c:dLbl>
+              <c:idx val="2"/>
+              <c:spPr/>
+              <c:txPr>
+                <a:bodyPr/>
+                <a:lstStyle/>
+                <a:p>
+                  <a:pPr>
+                    <a:defRPr/>
+                  </a:pPr>
+                </a:p>
+              </c:txPr>
+              <c:dLblPos val="outEnd"/>
+              <c:showLegendKey val="0"/>
+              <c:showVal val="1"/>
+              <c:showCatName val="0"/>
+              <c:showSerName val="0"/>
+              <c:showPercent val="0"/>
+              <c:showBubbleSize val="0"/>
+              <c:showLegendKey val="0"/>
+              <c:showVal val="0"/>
+              <c:showCatName val="1"/>
+              <c:showSerName val="0"/>
+              <c:showPercent val="1"/>
+              <c:showBubbleSize val="0"/>
+              <c:separator>; </c:separator>
+            </c:dLbl>
+            <c:dLbl>
+              <c:idx val="3"/>
+              <c:spPr/>
+              <c:txPr>
+                <a:bodyPr/>
+                <a:lstStyle/>
+                <a:p>
+                  <a:pPr>
+                    <a:defRPr/>
+                  </a:pPr>
+                </a:p>
+              </c:txPr>
+              <c:dLblPos val="outEnd"/>
+              <c:showLegendKey val="0"/>
+              <c:showVal val="1"/>
+              <c:showCatName val="0"/>
+              <c:showSerName val="0"/>
+              <c:showPercent val="0"/>
+              <c:showBubbleSize val="0"/>
+              <c:showLegendKey val="0"/>
+              <c:showVal val="0"/>
+              <c:showCatName val="1"/>
+              <c:showSerName val="0"/>
+              <c:showPercent val="1"/>
+              <c:showBubbleSize val="0"/>
+              <c:separator>; </c:separator>
+            </c:dLbl>
+            <c:dLbl>
+              <c:idx val="4"/>
+              <c:spPr/>
+              <c:txPr>
+                <a:bodyPr/>
+                <a:lstStyle/>
+                <a:p>
+                  <a:pPr>
+                    <a:defRPr/>
+                  </a:pPr>
+                </a:p>
+              </c:txPr>
+              <c:dLblPos val="outEnd"/>
+              <c:showLegendKey val="0"/>
+              <c:showVal val="1"/>
+              <c:showCatName val="0"/>
+              <c:showSerName val="0"/>
+              <c:showPercent val="0"/>
+              <c:showBubbleSize val="0"/>
+              <c:showLegendKey val="0"/>
+              <c:showVal val="0"/>
+              <c:showCatName val="1"/>
+              <c:showSerName val="0"/>
+              <c:showPercent val="1"/>
+              <c:showBubbleSize val="0"/>
+              <c:separator>; </c:separator>
+            </c:dLbl>
+            <c:dLbl>
+              <c:idx val="5"/>
+              <c:spPr/>
+              <c:txPr>
+                <a:bodyPr/>
+                <a:lstStyle/>
+                <a:p>
+                  <a:pPr>
+                    <a:defRPr/>
+                  </a:pPr>
+                </a:p>
+              </c:txPr>
+              <c:dLblPos val="outEnd"/>
+              <c:showLegendKey val="0"/>
+              <c:showVal val="1"/>
+              <c:showCatName val="0"/>
+              <c:showSerName val="0"/>
+              <c:showPercent val="0"/>
+              <c:showBubbleSize val="0"/>
+              <c:showLegendKey val="0"/>
+              <c:showVal val="0"/>
+              <c:showCatName val="1"/>
+              <c:showSerName val="0"/>
+              <c:showPercent val="1"/>
+              <c:showBubbleSize val="0"/>
+              <c:separator>; </c:separator>
+            </c:dLbl>
+            <c:showLegendKey val="0"/>
+            <c:showVal val="0"/>
+            <c:showCatName val="0"/>
+            <c:showSerName val="0"/>
+            <c:showPercent val="0"/>
+            <c:showBubbleSize val="0"/>
+            <c:showLeaderLines val="1"/>
+          </c:dLbls>
+          <c:cat>
+            <c:strRef>
+              <c:f>Sheet1!$A$2:$A$7</c:f>
+              <c:strCache>
+                <c:ptCount val="6"/>
+                <c:pt idx="0">
+                  <c:v>Категория 1</c:v>
+                </c:pt>
+                <c:pt idx="1">
+                  <c:v>Категория 2</c:v>
+                </c:pt>
+                <c:pt idx="2">
+                  <c:v>Категория 3</c:v>
+                </c:pt>
+                <c:pt idx="3">
+                  <c:v>Категория 4</c:v>
+                </c:pt>
+                <c:pt idx="4">
+                  <c:v>Категория 5</c:v>
+                </c:pt>
+                <c:pt idx="5">
+                  <c:v>Категория 6</c:v>
+                </c:pt>
+              </c:strCache>
+            </c:strRef>
+          </c:cat>
+          <c:val>
+            <c:numRef>
+              <c:f>Sheet1!$B$2:$B$7</c:f>
+              <c:numCache>
+                <c:formatCode>General</c:formatCode>
+                <c:ptCount val="6"/>
+                <c:pt idx="0">
+                  <c:v>2.0</c:v>
+                </c:pt>
+                <c:pt idx="1">
+                  <c:v>3.7</c:v>
+                </c:pt>
+                <c:pt idx="2">
+                  <c:v>5.4</c:v>
+                </c:pt>
+                <c:pt idx="3">
+                  <c:v>3.1</c:v>
+                </c:pt>
+                <c:pt idx="4">
+                  <c:v>4.8</c:v>
+                </c:pt>
+                <c:pt idx="5">
+                  <c:v>2.5</c:v>
+                </c:pt>
+              </c:numCache>
+            </c:numRef>
+          </c:val>
+        </c:ser>
+      </c:pieChart>
+    </c:plotArea>
+    <c:dispBlanksAs val="gap"/>
+  </c:chart>
+  <c:txPr>
+    <a:bodyPr/>
+    <a:lstStyle/>
+    <a:p>
+      <a:pPr>
+        <a:defRPr sz="1100">
+          <a:latin typeface="Arial"/>
+        </a:defRPr>
+      </a:pPr>
+      <a:endParaRPr lang="en-US"/>
+    </a:p>
+  </c:txPr>
+  <c:externalData r:id="rId1">
+    <c:autoUpdate val="0"/>
+  </c:externalData>
+</c:chartSpace>
+</file>
+
+<file path=ppt/charts/chart3.xml><?xml version="1.0" encoding="utf-8"?>
+<c:chartSpace xmlns:c="http://schemas.openxmlformats.org/drawingml/2006/chart" xmlns:a="http://schemas.openxmlformats.org/drawingml/2006/main" xmlns:r="http://schemas.openxmlformats.org/officeDocument/2006/relationships">
+  <c:date1904 val="0"/>
+  <c:chart>
+    <c:autoTitleDeleted val="0"/>
+    <c:plotArea>
+      <c:barChart>
+        <c:barDir val="bar"/>
+        <c:grouping val="percentStacked"/>
+        <c:ser>
+          <c:idx val="0"/>
+          <c:order val="0"/>
+          <c:tx>
+            <c:strRef>
+              <c:f>Sheet1!$B$1</c:f>
+              <c:strCache>
+                <c:ptCount val="1"/>
+                <c:pt idx="0">
+                  <c:v>Ряд 1</c:v>
+                </c:pt>
+              </c:strCache>
+            </c:strRef>
+          </c:tx>
+          <c:cat>
+            <c:strRef>
+              <c:f>Sheet1!$A$2:$A$6</c:f>
+              <c:strCache>
+                <c:ptCount val="5"/>
+                <c:pt idx="0">
+                  <c:v>Категория 1</c:v>
+                </c:pt>
+                <c:pt idx="1">
+                  <c:v>Категория 2</c:v>
+                </c:pt>
+                <c:pt idx="2">
+                  <c:v>Категория 3</c:v>
+                </c:pt>
+                <c:pt idx="3">
+                  <c:v>Категория 4</c:v>
+                </c:pt>
+                <c:pt idx="4">
+                  <c:v>Категория 5</c:v>
+                </c:pt>
+              </c:strCache>
+            </c:strRef>
+          </c:cat>
+          <c:val>
+            <c:numRef>
+              <c:f>Sheet1!$B$2:$B$6</c:f>
+              <c:numCache>
+                <c:formatCode>General</c:formatCode>
+                <c:ptCount val="5"/>
+                <c:pt idx="0">
+                  <c:v>2.0</c:v>
+                </c:pt>
+                <c:pt idx="1">
+                  <c:v>3.7</c:v>
+                </c:pt>
+                <c:pt idx="2">
+                  <c:v>5.4</c:v>
+                </c:pt>
+                <c:pt idx="3">
+                  <c:v>3.1</c:v>
+                </c:pt>
+                <c:pt idx="4">
+                  <c:v>4.8</c:v>
+                </c:pt>
+              </c:numCache>
+            </c:numRef>
+          </c:val>
+        </c:ser>
+        <c:ser>
+          <c:idx val="1"/>
+          <c:order val="1"/>
+          <c:tx>
+            <c:strRef>
+              <c:f>Sheet1!$C$1</c:f>
+              <c:strCache>
+                <c:ptCount val="1"/>
+                <c:pt idx="0">
+                  <c:v>Ряд 2</c:v>
+                </c:pt>
+              </c:strCache>
+            </c:strRef>
+          </c:tx>
+          <c:cat>
+            <c:strRef>
+              <c:f>Sheet1!$A$2:$A$6</c:f>
+              <c:strCache>
+                <c:ptCount val="5"/>
+                <c:pt idx="0">
+                  <c:v>Категория 1</c:v>
+                </c:pt>
+                <c:pt idx="1">
+                  <c:v>Категория 2</c:v>
+                </c:pt>
+                <c:pt idx="2">
+                  <c:v>Категория 3</c:v>
+                </c:pt>
+                <c:pt idx="3">
+                  <c:v>Категория 4</c:v>
+                </c:pt>
+                <c:pt idx="4">
+                  <c:v>Категория 5</c:v>
+                </c:pt>
+              </c:strCache>
+            </c:strRef>
+          </c:cat>
+          <c:val>
+            <c:numRef>
+              <c:f>Sheet1!$C$2:$C$6</c:f>
+              <c:numCache>
+                <c:formatCode>General</c:formatCode>
+                <c:ptCount val="5"/>
+                <c:pt idx="0">
+                  <c:v>3.7</c:v>
+                </c:pt>
+                <c:pt idx="1">
+                  <c:v>5.4</c:v>
+                </c:pt>
+                <c:pt idx="2">
+                  <c:v>3.1</c:v>
+                </c:pt>
+                <c:pt idx="3">
+                  <c:v>4.8</c:v>
+                </c:pt>
+                <c:pt idx="4">
+                  <c:v>2.5</c:v>
+                </c:pt>
+              </c:numCache>
+            </c:numRef>
+          </c:val>
+        </c:ser>
+        <c:dLbls>
+          <c:numFmt formatCode="0%" sourceLinked="0"/>
+          <c:txPr>
+            <a:bodyPr/>
+            <a:lstStyle/>
+            <a:p>
+              <a:pPr>
+                <a:defRPr sz="1100"/>
+              </a:pPr>
+            </a:p>
+          </c:txPr>
+          <c:dLblPos val="ctr"/>
+          <c:showLegendKey val="0"/>
+          <c:showVal val="1"/>
+          <c:showCatName val="0"/>
+          <c:showSerName val="0"/>
+          <c:showPercent val="0"/>
+          <c:showBubbleSize val="0"/>
+          <c:showLeaderLines val="1"/>
+        </c:dLbls>
+        <c:overlap val="100"/>
+        <c:axId val="-2068027336"/>
+        <c:axId val="-2113994440"/>
+      </c:barChart>
+      <c:catAx>
+        <c:axId val="-2068027336"/>
+        <c:scaling>
+          <c:orientation val="minMax"/>
+        </c:scaling>
+        <c:delete val="0"/>
+        <c:axPos val="l"/>
+        <c:majorTickMark val="out"/>
+        <c:minorTickMark val="none"/>
+        <c:tickLblPos val="nextTo"/>
+        <c:crossAx val="-2113994440"/>
+        <c:crosses val="autoZero"/>
+        <c:auto val="1"/>
+        <c:lblAlgn val="ctr"/>
+        <c:lblOffset val="100"/>
+        <c:noMultiLvlLbl val="0"/>
+      </c:catAx>
+      <c:valAx>
+        <c:axId val="-2113994440"/>
+        <c:scaling/>
+        <c:delete val="0"/>
+        <c:axPos val="b"/>
+        <c:majorGridlines/>
+        <c:majorTickMark val="out"/>
+        <c:minorTickMark val="none"/>
+        <c:tickLblPos val="nextTo"/>
+        <c:crossAx val="-2068027336"/>
+        <c:crosses val="autoZero"/>
+      </c:valAx>
+    </c:plotArea>
+    <c:legend>
+      <c:legendPos val="b"/>
+      <c:overlay val="0"/>
+    </c:legend>
+    <c:dispBlanksAs val="gap"/>
+  </c:chart>
+  <c:txPr>
+    <a:bodyPr/>
+    <a:lstStyle/>
+    <a:p>
+      <a:pPr>
+        <a:defRPr sz="1100">
+          <a:latin typeface="Arial"/>
+        </a:defRPr>
+      </a:pPr>
+      <a:endParaRPr lang="en-US"/>
+    </a:p>
+  </c:txPr>
+  <c:externalData r:id="rId1">
+    <c:autoUpdate val="0"/>
+  </c:externalData>
+</c:chartSpace>
+</file>
+
+<file path=ppt/charts/chart4.xml><?xml version="1.0" encoding="utf-8"?>
+<c:chartSpace xmlns:c="http://schemas.openxmlformats.org/drawingml/2006/chart" xmlns:a="http://schemas.openxmlformats.org/drawingml/2006/main" xmlns:r="http://schemas.openxmlformats.org/officeDocument/2006/relationships">
+  <c:date1904 val="0"/>
+  <c:chart>
+    <c:autoTitleDeleted val="0"/>
+    <c:plotArea>
+      <c:barChart>
+        <c:barDir val="col"/>
+        <c:grouping val="stacked"/>
+        <c:ser>
+          <c:idx val="0"/>
+          <c:order val="0"/>
+          <c:tx>
+            <c:strRef>
+              <c:f>Sheet1!$B$1</c:f>
+              <c:strCache>
+                <c:ptCount val="1"/>
+                <c:pt idx="0">
+                  <c:v>Ряд 1</c:v>
+                </c:pt>
+              </c:strCache>
+            </c:strRef>
+          </c:tx>
+          <c:cat>
+            <c:strRef>
+              <c:f>Sheet1!$A$2:$A$4</c:f>
+              <c:strCache>
+                <c:ptCount val="3"/>
+                <c:pt idx="0">
+                  <c:v>Категория 1</c:v>
+                </c:pt>
+                <c:pt idx="1">
+                  <c:v>Категория 2</c:v>
+                </c:pt>
+                <c:pt idx="2">
+                  <c:v>Категория 3</c:v>
+                </c:pt>
+              </c:strCache>
+            </c:strRef>
+          </c:cat>
+          <c:val>
+            <c:numRef>
+              <c:f>Sheet1!$B$2:$B$4</c:f>
+              <c:numCache>
+                <c:formatCode>General</c:formatCode>
+                <c:ptCount val="3"/>
+                <c:pt idx="0">
+                  <c:v>3.7</c:v>
+                </c:pt>
+                <c:pt idx="1">
+                  <c:v>5.4</c:v>
+                </c:pt>
+                <c:pt idx="2">
+                  <c:v>3.1</c:v>
+                </c:pt>
+              </c:numCache>
+            </c:numRef>
+          </c:val>
+        </c:ser>
+        <c:ser>
+          <c:idx val="1"/>
+          <c:order val="1"/>
+          <c:tx>
+            <c:strRef>
+              <c:f>Sheet1!$C$1</c:f>
+              <c:strCache>
+                <c:ptCount val="1"/>
+                <c:pt idx="0">
+                  <c:v>Ряд 2</c:v>
+                </c:pt>
+              </c:strCache>
+            </c:strRef>
+          </c:tx>
+          <c:cat>
+            <c:strRef>
+              <c:f>Sheet1!$A$2:$A$4</c:f>
+              <c:strCache>
+                <c:ptCount val="3"/>
+                <c:pt idx="0">
+                  <c:v>Категория 1</c:v>
+                </c:pt>
+                <c:pt idx="1">
+                  <c:v>Категория 2</c:v>
+                </c:pt>
+                <c:pt idx="2">
+                  <c:v>Категория 3</c:v>
+                </c:pt>
+              </c:strCache>
+            </c:strRef>
+          </c:cat>
+          <c:val>
+            <c:numRef>
+              <c:f>Sheet1!$C$2:$C$4</c:f>
+              <c:numCache>
+                <c:formatCode>General</c:formatCode>
+                <c:ptCount val="3"/>
+                <c:pt idx="0">
+                  <c:v>5.4</c:v>
+                </c:pt>
+                <c:pt idx="1">
+                  <c:v>3.1</c:v>
+                </c:pt>
+                <c:pt idx="2">
+                  <c:v>4.8</c:v>
+                </c:pt>
+              </c:numCache>
+            </c:numRef>
+          </c:val>
+        </c:ser>
+        <c:dLbls>
+          <c:numFmt formatCode="#,##0" sourceLinked="0"/>
+          <c:txPr>
+            <a:bodyPr/>
+            <a:lstStyle/>
+            <a:p>
+              <a:pPr>
+                <a:defRPr sz="1100"/>
+              </a:pPr>
+            </a:p>
+          </c:txPr>
+          <c:showLegendKey val="0"/>
+          <c:showVal val="1"/>
+          <c:showCatName val="0"/>
+          <c:showSerName val="0"/>
+          <c:showPercent val="0"/>
+          <c:showBubbleSize val="0"/>
+          <c:showLeaderLines val="1"/>
+        </c:dLbls>
+        <c:overlap val="100"/>
+        <c:axId val="-2068027336"/>
+        <c:axId val="-2113994440"/>
+      </c:barChart>
+      <c:catAx>
+        <c:axId val="-2068027336"/>
+        <c:scaling>
+          <c:orientation val="minMax"/>
+        </c:scaling>
+        <c:delete val="0"/>
+        <c:axPos val="b"/>
+        <c:majorTickMark val="out"/>
+        <c:minorTickMark val="none"/>
+        <c:tickLblPos val="nextTo"/>
+        <c:crossAx val="-2113994440"/>
+        <c:crosses val="autoZero"/>
+        <c:auto val="1"/>
+        <c:lblAlgn val="ctr"/>
+        <c:lblOffset val="100"/>
+        <c:noMultiLvlLbl val="0"/>
+      </c:catAx>
+      <c:valAx>
+        <c:axId val="-2113994440"/>
+        <c:scaling/>
+        <c:delete val="0"/>
+        <c:axPos val="l"/>
+        <c:majorGridlines/>
+        <c:majorTickMark val="out"/>
+        <c:minorTickMark val="none"/>
+        <c:tickLblPos val="nextTo"/>
+        <c:crossAx val="-2068027336"/>
+        <c:crosses val="autoZero"/>
+      </c:valAx>
+    </c:plotArea>
+    <c:dispBlanksAs val="gap"/>
+  </c:chart>
+  <c:txPr>
+    <a:bodyPr/>
+    <a:lstStyle/>
+    <a:p>
+      <a:pPr>
+        <a:defRPr sz="1100">
+          <a:latin typeface="Arial"/>
+        </a:defRPr>
+      </a:pPr>
+      <a:endParaRPr lang="en-US"/>
+    </a:p>
+  </c:txPr>
+  <c:externalData r:id="rId1">
+    <c:autoUpdate val="0"/>
+  </c:externalData>
+</c:chartSpace>
+</file>
+
+<file path=ppt/charts/chart5.xml><?xml version="1.0" encoding="utf-8"?>
+<c:chartSpace xmlns:c="http://schemas.openxmlformats.org/drawingml/2006/chart" xmlns:a="http://schemas.openxmlformats.org/drawingml/2006/main" xmlns:r="http://schemas.openxmlformats.org/officeDocument/2006/relationships">
+  <c:date1904 val="0"/>
+  <c:chart>
+    <c:autoTitleDeleted val="0"/>
+    <c:plotArea>
+      <c:barChart>
+        <c:barDir val="col"/>
+        <c:grouping val="stacked"/>
+        <c:ser>
+          <c:idx val="0"/>
+          <c:order val="0"/>
+          <c:tx>
+            <c:strRef>
+              <c:f>Sheet1!$B$1</c:f>
+              <c:strCache>
+                <c:ptCount val="1"/>
+                <c:pt idx="0">
+                  <c:v>Ряд 1</c:v>
+                </c:pt>
+              </c:strCache>
+            </c:strRef>
+          </c:tx>
+          <c:cat>
+            <c:strRef>
+              <c:f>Sheet1!$A$2:$A$4</c:f>
+              <c:strCache>
+                <c:ptCount val="3"/>
+                <c:pt idx="0">
+                  <c:v>Категория 1</c:v>
+                </c:pt>
+                <c:pt idx="1">
+                  <c:v>Категория 2</c:v>
+                </c:pt>
+                <c:pt idx="2">
+                  <c:v>Категория 3</c:v>
+                </c:pt>
+              </c:strCache>
+            </c:strRef>
+          </c:cat>
+          <c:val>
+            <c:numRef>
+              <c:f>Sheet1!$B$2:$B$4</c:f>
+              <c:numCache>
+                <c:formatCode>General</c:formatCode>
+                <c:ptCount val="3"/>
+                <c:pt idx="0">
+                  <c:v>5.4</c:v>
+                </c:pt>
+                <c:pt idx="1">
+                  <c:v>3.1</c:v>
+                </c:pt>
+                <c:pt idx="2">
+                  <c:v>4.8</c:v>
+                </c:pt>
+              </c:numCache>
+            </c:numRef>
+          </c:val>
+        </c:ser>
+        <c:ser>
+          <c:idx val="1"/>
+          <c:order val="1"/>
+          <c:tx>
+            <c:strRef>
+              <c:f>Sheet1!$C$1</c:f>
+              <c:strCache>
+                <c:ptCount val="1"/>
+                <c:pt idx="0">
+                  <c:v>Ряд 2</c:v>
+                </c:pt>
+              </c:strCache>
+            </c:strRef>
+          </c:tx>
+          <c:cat>
+            <c:strRef>
+              <c:f>Sheet1!$A$2:$A$4</c:f>
+              <c:strCache>
+                <c:ptCount val="3"/>
+                <c:pt idx="0">
+                  <c:v>Категория 1</c:v>
+                </c:pt>
+                <c:pt idx="1">
+                  <c:v>Категория 2</c:v>
+                </c:pt>
+                <c:pt idx="2">
+                  <c:v>Категория 3</c:v>
+                </c:pt>
+              </c:strCache>
+            </c:strRef>
+          </c:cat>
+          <c:val>
+            <c:numRef>
+              <c:f>Sheet1!$C$2:$C$4</c:f>
+              <c:numCache>
+                <c:formatCode>General</c:formatCode>
+                <c:ptCount val="3"/>
+                <c:pt idx="0">
+                  <c:v>3.1</c:v>
+                </c:pt>
+                <c:pt idx="1">
+                  <c:v>4.8</c:v>
+                </c:pt>
+                <c:pt idx="2">
+                  <c:v>2.5</c:v>
+                </c:pt>
+              </c:numCache>
+            </c:numRef>
+          </c:val>
+        </c:ser>
+        <c:dLbls>
+          <c:numFmt formatCode="#,##0" sourceLinked="0"/>
+          <c:txPr>
+            <a:bodyPr/>
+            <a:lstStyle/>
+            <a:p>
+              <a:pPr>
+                <a:defRPr sz="1100"/>
+              </a:pPr>
+            </a:p>
+          </c:txPr>
+          <c:showLegendKey val="0"/>
+          <c:showVal val="1"/>
+          <c:showCatName val="0"/>
+          <c:showSerName val="0"/>
+          <c:showPercent val="0"/>
+          <c:showBubbleSize val="0"/>
+          <c:showLeaderLines val="1"/>
+        </c:dLbls>
+        <c:overlap val="100"/>
+        <c:axId val="-2068027336"/>
+        <c:axId val="-2113994440"/>
+      </c:barChart>
+      <c:lineChart>
+        <c:grouping val="standard"/>
+        <c:varyColors val="0"/>
+        <c:ser>
+          <c:idx val="2"/>
+          <c:order val="2"/>
+          <c:tx>
+            <c:strRef>
+              <c:f>Sheet1!$D$1</c:f>
+              <c:strCache>
+                <c:ptCount val="1"/>
+                <c:pt idx="0">
+                  <c:v>Ряд 3</c:v>
+                </c:pt>
+              </c:strCache>
+            </c:strRef>
+          </c:tx>
+          <c:spPr>
+            <a:ln w="28575" cap="rnd">
+              <a:solidFill>
+                <a:schemeClr val="accent2"/>
+              </a:solidFill>
+            </a:ln>
+          </c:spPr>
+          <c:marker>
+            <c:symbol val="circle"/>
+            <c:size val="7"/>
+          </c:marker>
+          <c:cat>
+            <c:strRef>
+              <c:f>Sheet1!$A$2:$A$4</c:f>
+              <c:strCache>
+                <c:ptCount val="3"/>
+                <c:pt idx="0">
+                  <c:v>Категория 1</c:v>
+                </c:pt>
+                <c:pt idx="1">
+                  <c:v>Категория 2</c:v>
+                </c:pt>
+                <c:pt idx="2">
+                  <c:v>Категория 3</c:v>
+                </c:pt>
+              </c:strCache>
+            </c:strRef>
+          </c:cat>
+          <c:val>
+            <c:numRef>
+              <c:f>Sheet1!$D$2:$D$4</c:f>
+              <c:numCache>
+                <c:formatCode>General</c:formatCode>
+                <c:ptCount val="3"/>
+                <c:pt idx="0">
+                  <c:v>4.8</c:v>
+                </c:pt>
+                <c:pt idx="1">
+                  <c:v>2.5</c:v>
+                </c:pt>
+                <c:pt idx="2">
+                  <c:v>4.2</c:v>
+                </c:pt>
+              </c:numCache>
+            </c:numRef>
+          </c:val>
+          <c:smooth val="0"/>
+        </c:ser>
+        <c:dLbls>
+          <c:numFmt formatCode="#,##0" sourceLinked="0"/>
+          <c:spPr>
+            <a:noFill/>
+          </c:spPr>
+          <c:dLblPos val="t"/>
+          <c:showLegendKey val="0"/>
+          <c:showVal val="1"/>
+          <c:showCatName val="0"/>
+          <c:showSerName val="0"/>
+          <c:showPercent val="0"/>
+          <c:showBubbleSize val="0"/>
+        </c:dLbls>
+        <c:marker val="1"/>
+        <c:axId val="50010"/>
+        <c:axId val="50011"/>
+      </c:lineChart>
+      <c:catAx>
+        <c:axId val="-2068027336"/>
+        <c:scaling>
+          <c:orientation val="minMax"/>
+        </c:scaling>
+        <c:delete val="0"/>
+        <c:axPos val="b"/>
+        <c:majorTickMark val="out"/>
+        <c:minorTickMark val="none"/>
+        <c:tickLblPos val="nextTo"/>
+        <c:crossAx val="-2113994440"/>
+        <c:crosses val="autoZero"/>
+        <c:auto val="1"/>
+        <c:lblAlgn val="ctr"/>
+        <c:lblOffset val="100"/>
+        <c:noMultiLvlLbl val="0"/>
+      </c:catAx>
+      <c:valAx>
+        <c:axId val="-2113994440"/>
+        <c:scaling/>
+        <c:delete val="0"/>
+        <c:axPos val="l"/>
+        <c:majorGridlines/>
+        <c:majorTickMark val="out"/>
+        <c:minorTickMark val="none"/>
+        <c:tickLblPos val="nextTo"/>
+        <c:crossAx val="-2068027336"/>
+        <c:crosses val="autoZero"/>
+      </c:valAx>
+      <c:catAx>
+        <c:axId val="50010"/>
+        <c:scaling>
+          <c:orientation val="minMax"/>
+        </c:scaling>
+        <c:delete val="1"/>
+        <c:axPos val="b"/>
+        <c:majorTickMark val="none"/>
+        <c:minorTickMark val="none"/>
+        <c:tickLblPos val="nextTo"/>
+        <c:crossAx val="50011"/>
+        <c:crosses val="autoZero"/>
+        <c:auto val="1"/>
+        <c:lblAlgn val="ctr"/>
+        <c:lblOffset val="100"/>
+        <c:noMultiLvlLbl val="0"/>
+      </c:catAx>
+      <c:valAx>
+        <c:axId val="50011"/>
+        <c:scaling>
+          <c:orientation val="minMax"/>
+        </c:scaling>
+        <c:delete val="0"/>
+        <c:axPos val="r"/>
+        <c:numFmt formatCode="General" sourceLinked="1"/>
+        <c:majorTickMark val="none"/>
+        <c:minorTickMark val="none"/>
+        <c:tickLblPos val="nextTo"/>
+        <c:txPr>
+          <a:bodyPr/>
+          <a:lstStyle/>
+          <a:p>
+            <a:pPr>
+              <a:defRPr sz="900">
+                <a:solidFill>
+                  <a:srgbClr val="FFFFFF"/>
+                </a:solidFill>
+              </a:defRPr>
+            </a:pPr>
+            <a:endParaRPr lang="ru-RU"/>
+          </a:p>
+        </c:txPr>
+        <c:crossAx val="50010"/>
+        <c:crosses val="max"/>
+        <c:crossBetween val="between"/>
+      </c:valAx>
+      <c:spPr>
+        <a:noFill/>
+      </c:spPr>
+    </c:plotArea>
+    <c:dispBlanksAs val="gap"/>
+  </c:chart>
+  <c:spPr>
+    <a:noFill/>
+  </c:spPr>
+  <c:txPr>
+    <a:bodyPr/>
+    <a:lstStyle/>
+    <a:p>
+      <a:pPr>
+        <a:defRPr sz="1100">
+          <a:latin typeface="Arial"/>
+        </a:defRPr>
+      </a:pPr>
+      <a:endParaRPr lang="en-US"/>
+    </a:p>
+  </c:txPr>
+  <c:externalData r:id="rId1">
+    <c:autoUpdate val="0"/>
+  </c:externalData>
+</c:chartSpace>
+</file>
+
+<file path=ppt/charts/chart6.xml><?xml version="1.0" encoding="utf-8"?>
+<c:chartSpace xmlns:c="http://schemas.openxmlformats.org/drawingml/2006/chart" xmlns:a="http://schemas.openxmlformats.org/drawingml/2006/main" xmlns:r="http://schemas.openxmlformats.org/officeDocument/2006/relationships">
+  <c:date1904 val="0"/>
+  <c:chart>
+    <c:title>
+      <c:tx>
+        <c:rich>
+          <a:bodyPr/>
+          <a:lstStyle/>
+          <a:p>
+            <a:r>
+              <a:t>Выручка {{Год}}</a:t>
+            </a:r>
+          </a:p>
+        </c:rich>
+      </c:tx>
+      <c:layout/>
+      <c:overlay val="0"/>
+    </c:title>
+    <c:autoTitleDeleted val="0"/>
+    <c:plotArea>
+      <c:barChart>
+        <c:barDir val="col"/>
+        <c:grouping val="clustered"/>
+        <c:ser>
+          <c:idx val="0"/>
+          <c:order val="0"/>
+          <c:tx>
+            <c:strRef>
+              <c:f>Sheet1!$B$1</c:f>
+              <c:strCache>
+                <c:ptCount val="1"/>
+                <c:pt idx="0">
+                  <c:v>Ряд 1</c:v>
+                </c:pt>
+              </c:strCache>
+            </c:strRef>
+          </c:tx>
+          <c:cat>
+            <c:strRef>
+              <c:f>Sheet1!$A$2:$A$4</c:f>
+              <c:strCache>
+                <c:ptCount val="3"/>
+                <c:pt idx="0">
+                  <c:v>Категория 1</c:v>
+                </c:pt>
+                <c:pt idx="1">
+                  <c:v>Категория 2</c:v>
+                </c:pt>
+                <c:pt idx="2">
+                  <c:v>Категория 3</c:v>
+                </c:pt>
+              </c:strCache>
+            </c:strRef>
+          </c:cat>
+          <c:val>
+            <c:numRef>
+              <c:f>Sheet1!$B$2:$B$4</c:f>
+              <c:numCache>
+                <c:formatCode>General</c:formatCode>
+                <c:ptCount val="3"/>
+                <c:pt idx="0">
+                  <c:v>2.0</c:v>
+                </c:pt>
+                <c:pt idx="1">
+                  <c:v>3.7</c:v>
+                </c:pt>
+                <c:pt idx="2">
+                  <c:v>5.4</c:v>
+                </c:pt>
+              </c:numCache>
+            </c:numRef>
+          </c:val>
+        </c:ser>
+        <c:axId val="-2068027336"/>
+        <c:axId val="-2113994440"/>
+      </c:barChart>
+      <c:catAx>
+        <c:axId val="-2068027336"/>
+        <c:scaling>
+          <c:orientation val="minMax"/>
+        </c:scaling>
+        <c:delete val="0"/>
+        <c:axPos val="b"/>
+        <c:majorTickMark val="out"/>
+        <c:minorTickMark val="none"/>
+        <c:tickLblPos val="nextTo"/>
+        <c:crossAx val="-2113994440"/>
+        <c:crosses val="autoZero"/>
+        <c:auto val="1"/>
+        <c:lblAlgn val="ctr"/>
+        <c:lblOffset val="100"/>
+        <c:noMultiLvlLbl val="0"/>
+      </c:catAx>
+      <c:valAx>
+        <c:axId val="-2113994440"/>
+        <c:scaling/>
+        <c:delete val="0"/>
+        <c:axPos val="l"/>
+        <c:majorGridlines/>
+        <c:majorTickMark val="out"/>
+        <c:minorTickMark val="none"/>
+        <c:tickLblPos val="nextTo"/>
+        <c:crossAx val="-2068027336"/>
+        <c:crosses val="autoZero"/>
+      </c:valAx>
+    </c:plotArea>
+    <c:dispBlanksAs val="gap"/>
+  </c:chart>
+  <c:txPr>
+    <a:bodyPr/>
+    <a:lstStyle/>
+    <a:p>
+      <a:pPr>
+        <a:defRPr sz="1100">
+          <a:latin typeface="Arial"/>
+        </a:defRPr>
+      </a:pPr>
+      <a:endParaRPr lang="en-US"/>
+    </a:p>
+  </c:txPr>
+  <c:externalData r:id="rId1">
+    <c:autoUpdate val="0"/>
+  </c:externalData>
+</c:chartSpace>
+</file>
+
+<file path=ppt/notesMasters/notesMaster1.xml><?xml version="1.0" encoding="utf-8"?>
+<p:notesMaster xmlns:a="http://schemas.openxmlformats.org/drawingml/2006/main" xmlns:p="http://schemas.openxmlformats.org/presentationml/2006/main" xmlns:r="http://schemas.openxmlformats.org/officeDocument/2006/relationships">
+  <p:cSld>
+    <p:bg>
+      <p:bgRef idx="1001">
+        <a:schemeClr val="bg1"/>
+      </p:bgRef>
+    </p:bg>
+    <p:spTree>
+      <p:nvGrpSpPr>
+        <p:cNvPr id="1" name=""/>
+        <p:cNvGrpSpPr/>
+        <p:nvPr/>
+      </p:nvGrpSpPr>
+      <p:grpSpPr>
+        <a:xfrm>
+          <a:off x="0" y="0"/>
+          <a:ext cx="0" cy="0"/>
+          <a:chOff x="0" y="0"/>
+          <a:chExt cx="0" cy="0"/>
+        </a:xfrm>
+      </p:grpSpPr>
+      <p:sp>
+        <p:nvSpPr>
+          <p:cNvPr id="2" name="Header Placeholder 1"/>
+          <p:cNvSpPr>
+            <a:spLocks noGrp="1"/>
+          </p:cNvSpPr>
+          <p:nvPr>
+            <p:ph type="hdr" sz="quarter"/>
+          </p:nvPr>
+        </p:nvSpPr>
+        <p:spPr>
+          <a:xfrm>
+            <a:off x="0" y="0"/>
+            <a:ext cx="2971800" cy="457200"/>
+          </a:xfrm>
+          <a:prstGeom prst="rect">
+            <a:avLst/>
+          </a:prstGeom>
+        </p:spPr>
+        <p:txBody>
+          <a:bodyPr vert="horz" lIns="91440" tIns="45720" rIns="91440" bIns="45720" rtlCol="0"/>
+          <a:lstStyle>
+            <a:lvl1pPr algn="l">
+              <a:defRPr sz="1200"/>
+            </a:lvl1pPr>
+          </a:lstStyle>
+          <a:p>
+            <a:endParaRPr lang="en-US"/>
+          </a:p>
+        </p:txBody>
+      </p:sp>
+      <p:sp>
+        <p:nvSpPr>
+          <p:cNvPr id="3" name="Date Placeholder 2"/>
+          <p:cNvSpPr>
+            <a:spLocks noGrp="1"/>
+          </p:cNvSpPr>
+          <p:nvPr>
+            <p:ph type="dt" idx="1"/>
+          </p:nvPr>
+        </p:nvSpPr>
+        <p:spPr>
+          <a:xfrm>
+            <a:off x="3884613" y="0"/>
+            <a:ext cx="2971800" cy="457200"/>
+          </a:xfrm>
+          <a:prstGeom prst="rect">
+            <a:avLst/>
+          </a:prstGeom>
+        </p:spPr>
+        <p:txBody>
+          <a:bodyPr vert="horz" lIns="91440" tIns="45720" rIns="91440" bIns="45720" rtlCol="0"/>
+          <a:lstStyle>
+            <a:lvl1pPr algn="r">
+              <a:defRPr sz="1200"/>
+            </a:lvl1pPr>
+          </a:lstStyle>
+          <a:p>
+            <a:fld id="{0F89C1C7-3DCD-1040-A9CF-14679D8B5DDD}" type="datetimeFigureOut">
+              <a:rPr lang="en-US" smtClean="0"/>
+              <a:t>10/17/16</a:t>
+            </a:fld>
+            <a:endParaRPr lang="en-US"/>
+          </a:p>
+        </p:txBody>
+      </p:sp>
+      <p:sp>
+        <p:nvSpPr>
+          <p:cNvPr id="4" name="Slide Image Placeholder 3"/>
+          <p:cNvSpPr>
+            <a:spLocks noGrp="1" noRot="1" noChangeAspect="1"/>
+          </p:cNvSpPr>
+          <p:nvPr>
+            <p:ph type="sldImg" idx="2"/>
+          </p:nvPr>
+        </p:nvSpPr>
+        <p:spPr>
+          <a:xfrm>
+            <a:off x="1143000" y="685800"/>
+            <a:ext cx="4572000" cy="3429000"/>
+          </a:xfrm>
+          <a:prstGeom prst="rect">
+            <a:avLst/>
+          </a:prstGeom>
+          <a:noFill/>
+          <a:ln w="12700">
+            <a:solidFill>
+              <a:prstClr val="black"/>
+            </a:solidFill>
+          </a:ln>
+        </p:spPr>
+        <p:txBody>
+          <a:bodyPr vert="horz" lIns="91440" tIns="45720" rIns="91440" bIns="45720" rtlCol="0" anchor="ctr"/>
+          <a:lstStyle/>
+          <a:p>
+            <a:endParaRPr lang="en-US"/>
+          </a:p>
+        </p:txBody>
+      </p:sp>
+      <p:sp>
+        <p:nvSpPr>
+          <p:cNvPr id="5" name="Notes Placeholder 4"/>
+          <p:cNvSpPr>
+            <a:spLocks noGrp="1"/>
+          </p:cNvSpPr>
+          <p:nvPr>
+            <p:ph type="body" sz="quarter" idx="3"/>
+          </p:nvPr>
+        </p:nvSpPr>
+        <p:spPr>
+          <a:xfrm>
+            <a:off x="685800" y="4343400"/>
+            <a:ext cx="5486400" cy="4114800"/>
+          </a:xfrm>
+          <a:prstGeom prst="rect">
+            <a:avLst/>
+          </a:prstGeom>
+        </p:spPr>
+        <p:txBody>
+          <a:bodyPr vert="horz" lIns="91440" tIns="45720" rIns="91440" bIns="45720" rtlCol="0"/>
+          <a:lstStyle/>
+          <a:p>
+            <a:pPr lvl="0"/>
+            <a:r>
+              <a:rPr lang="en-US" smtClean="0"/>
+              <a:t>Click to edit Master text styles</a:t>
+            </a:r>
+          </a:p>
+          <a:p>
+            <a:pPr lvl="1"/>
+            <a:r>
+              <a:rPr lang="en-US" smtClean="0"/>
+              <a:t>Second level</a:t>
+            </a:r>
+          </a:p>
+          <a:p>
+            <a:pPr lvl="2"/>
+            <a:r>
+              <a:rPr lang="en-US" smtClean="0"/>
+              <a:t>Third level</a:t>
+            </a:r>
+          </a:p>
+          <a:p>
+            <a:pPr lvl="3"/>
+            <a:r>
+              <a:rPr lang="en-US" smtClean="0"/>
+              <a:t>Fourth level</a:t>
+            </a:r>
+          </a:p>
+          <a:p>
+            <a:pPr lvl="4"/>
+            <a:r>
+              <a:rPr lang="en-US" smtClean="0"/>
+              <a:t>Fifth level</a:t>
+            </a:r>
+            <a:endParaRPr lang="en-US"/>
+          </a:p>
+        </p:txBody>
+      </p:sp>
+      <p:sp>
+        <p:nvSpPr>
+          <p:cNvPr id="6" name="Footer Placeholder 5"/>
+          <p:cNvSpPr>
+            <a:spLocks noGrp="1"/>
+          </p:cNvSpPr>
+          <p:nvPr>
+            <p:ph type="ftr" sz="quarter" idx="4"/>
+          </p:nvPr>
+        </p:nvSpPr>
+        <p:spPr>
+          <a:xfrm>
+            <a:off x="0" y="8685213"/>
+            <a:ext cx="2971800" cy="457200"/>
+          </a:xfrm>
+          <a:prstGeom prst="rect">
+            <a:avLst/>
+          </a:prstGeom>
+        </p:spPr>
+        <p:txBody>
+          <a:bodyPr vert="horz" lIns="91440" tIns="45720" rIns="91440" bIns="45720" rtlCol="0" anchor="b"/>
+          <a:lstStyle>
+            <a:lvl1pPr algn="l">
+              <a:defRPr sz="1200"/>
+            </a:lvl1pPr>
+          </a:lstStyle>
+          <a:p>
+            <a:endParaRPr lang="en-US"/>
+          </a:p>
+        </p:txBody>
+      </p:sp>
+      <p:sp>
+        <p:nvSpPr>
+          <p:cNvPr id="7" name="Slide Number Placeholder 6"/>
+          <p:cNvSpPr>
+            <a:spLocks noGrp="1"/>
+          </p:cNvSpPr>
+          <p:nvPr>
+            <p:ph type="sldNum" sz="quarter" idx="5"/>
+          </p:nvPr>
+        </p:nvSpPr>
+        <p:spPr>
+          <a:xfrm>
+            <a:off x="3884613" y="8685213"/>
+            <a:ext cx="2971800" cy="457200"/>
+          </a:xfrm>
+          <a:prstGeom prst="rect">
+            <a:avLst/>
+          </a:prstGeom>
+        </p:spPr>
+        <p:txBody>
+          <a:bodyPr vert="horz" lIns="91440" tIns="45720" rIns="91440" bIns="45720" rtlCol="0" anchor="b"/>
+          <a:lstStyle>
+            <a:lvl1pPr algn="r">
+              <a:defRPr sz="1200"/>
+            </a:lvl1pPr>
+          </a:lstStyle>
+          <a:p>
+            <a:fld id="{BB5E49A5-4136-284D-997B-48E1D791AD67}" type="slidenum">
+              <a:rPr lang="en-US" smtClean="0"/>
+              <a:t>‹#›</a:t>
+            </a:fld>
+            <a:endParaRPr lang="en-US"/>
+          </a:p>
+        </p:txBody>
+      </p:sp>
+    </p:spTree>
+    <p:extLst>
+      <p:ext uri="{BB962C8B-B14F-4D97-AF65-F5344CB8AC3E}">
+        <p14:creationId xmlns:p14="http://schemas.microsoft.com/office/powerpoint/2010/main" val="2623252185"/>
+      </p:ext>
+    </p:extLst>
+  </p:cSld>
+  <p:clrMap bg1="lt1" tx1="dk1" bg2="lt2" tx2="dk2" accent1="accent1" accent2="accent2" accent3="accent3" accent4="accent4" accent5="accent5" accent6="accent6" hlink="hlink" folHlink="folHlink"/>
+  <p:notesStyle>
+    <a:lvl1pPr marL="0" algn="l" defTabSz="457200" rtl="0" eaLnBrk="1" latinLnBrk="0" hangingPunct="1">
+      <a:defRPr sz="1200" kern="1200">
+        <a:solidFill>
+          <a:schemeClr val="tx1"/>
+        </a:solidFill>
+        <a:latin typeface="+mn-lt"/>
+        <a:ea typeface="+mn-ea"/>
+        <a:cs typeface="+mn-cs"/>
+      </a:defRPr>
+    </a:lvl1pPr>
+    <a:lvl2pPr marL="457200" algn="l" defTabSz="457200" rtl="0" eaLnBrk="1" latinLnBrk="0" hangingPunct="1">
+      <a:defRPr sz="1200" kern="1200">
+        <a:solidFill>
+          <a:schemeClr val="tx1"/>
+        </a:solidFill>
+        <a:latin typeface="+mn-lt"/>
+        <a:ea typeface="+mn-ea"/>
+        <a:cs typeface="+mn-cs"/>
+      </a:defRPr>
+    </a:lvl2pPr>
+    <a:lvl3pPr marL="914400" algn="l" defTabSz="457200" rtl="0" eaLnBrk="1" latinLnBrk="0" hangingPunct="1">
+      <a:defRPr sz="1200" kern="1200">
+        <a:solidFill>
+          <a:schemeClr val="tx1"/>
+        </a:solidFill>
+        <a:latin typeface="+mn-lt"/>
+        <a:ea typeface="+mn-ea"/>
+        <a:cs typeface="+mn-cs"/>
+      </a:defRPr>
+    </a:lvl3pPr>
+    <a:lvl4pPr marL="1371600" algn="l" defTabSz="457200" rtl="0" eaLnBrk="1" latinLnBrk="0" hangingPunct="1">
+      <a:defRPr sz="1200" kern="1200">
+        <a:solidFill>
+          <a:schemeClr val="tx1"/>
+        </a:solidFill>
+        <a:latin typeface="+mn-lt"/>
+        <a:ea typeface="+mn-ea"/>
+        <a:cs typeface="+mn-cs"/>
+      </a:defRPr>
+    </a:lvl4pPr>
+    <a:lvl5pPr marL="1828800" algn="l" defTabSz="457200" rtl="0" eaLnBrk="1" latinLnBrk="0" hangingPunct="1">
+      <a:defRPr sz="1200" kern="1200">
+        <a:solidFill>
+          <a:schemeClr val="tx1"/>
+        </a:solidFill>
+        <a:latin typeface="+mn-lt"/>
+        <a:ea typeface="+mn-ea"/>
+        <a:cs typeface="+mn-cs"/>
+      </a:defRPr>
+    </a:lvl5pPr>
+    <a:lvl6pPr marL="2286000" algn="l" defTabSz="457200" rtl="0" eaLnBrk="1" latinLnBrk="0" hangingPunct="1">
+      <a:defRPr sz="1200" kern="1200">
+        <a:solidFill>
+          <a:schemeClr val="tx1"/>
+        </a:solidFill>
+        <a:latin typeface="+mn-lt"/>
+        <a:ea typeface="+mn-ea"/>
+        <a:cs typeface="+mn-cs"/>
+      </a:defRPr>
+    </a:lvl6pPr>
+    <a:lvl7pPr marL="2743200" algn="l" defTabSz="457200" rtl="0" eaLnBrk="1" latinLnBrk="0" hangingPunct="1">
+      <a:defRPr sz="1200" kern="1200">
+        <a:solidFill>
+          <a:schemeClr val="tx1"/>
+        </a:solidFill>
+        <a:latin typeface="+mn-lt"/>
+        <a:ea typeface="+mn-ea"/>
+        <a:cs typeface="+mn-cs"/>
+      </a:defRPr>
+    </a:lvl7pPr>
+    <a:lvl8pPr marL="3200400" algn="l" defTabSz="457200" rtl="0" eaLnBrk="1" latinLnBrk="0" hangingPunct="1">
+      <a:defRPr sz="1200" kern="1200">
+        <a:solidFill>
+          <a:schemeClr val="tx1"/>
+        </a:solidFill>
+        <a:latin typeface="+mn-lt"/>
+        <a:ea typeface="+mn-ea"/>
+        <a:cs typeface="+mn-cs"/>
+      </a:defRPr>
+    </a:lvl8pPr>
+    <a:lvl9pPr marL="3657600" algn="l" defTabSz="457200" rtl="0" eaLnBrk="1" latinLnBrk="0" hangingPunct="1">
+      <a:defRPr sz="1200" kern="1200">
+        <a:solidFill>
+          <a:schemeClr val="tx1"/>
+        </a:solidFill>
+        <a:latin typeface="+mn-lt"/>
+        <a:ea typeface="+mn-ea"/>
+        <a:cs typeface="+mn-cs"/>
+      </a:defRPr>
+    </a:lvl9pPr>
+  </p:notesStyle>
+</p:notesMaster>
+</file>
+
+<file path=ppt/notesSlides/notesSlide1.xml><?xml version="1.0" encoding="utf-8"?>
+<p:notes xmlns:a="http://schemas.openxmlformats.org/drawingml/2006/main" xmlns:p="http://schemas.openxmlformats.org/presentationml/2006/main" xmlns:r="http://schemas.openxmlformats.org/officeDocument/2006/relationships">
+  <p:cSld>
+    <p:spTree>
+      <p:nvGrpSpPr>
+        <p:cNvPr id="1" name=""/>
+        <p:cNvGrpSpPr/>
+        <p:nvPr/>
+      </p:nvGrpSpPr>
+      <p:grpSpPr>
+        <a:xfrm>
+          <a:off x="0" y="0"/>
+          <a:ext cx="0" cy="0"/>
+          <a:chOff x="0" y="0"/>
+          <a:chExt cx="0" cy="0"/>
+        </a:xfrm>
+      </p:grpSpPr>
+      <p:sp>
+        <p:nvSpPr>
+          <p:cNvPr id="2" name="Slide Image Placeholder 1"/>
+          <p:cNvSpPr>
+            <a:spLocks noGrp="1"/>
+          </p:cNvSpPr>
+          <p:nvPr>
+            <p:ph type="sldImg" idx="2"/>
+          </p:nvPr>
+        </p:nvSpPr>
+        <p:spPr/>
+      </p:sp>
+      <p:sp>
+        <p:nvSpPr>
+          <p:cNvPr id="3" name="Notes Placeholder 2"/>
+          <p:cNvSpPr>
+            <a:spLocks noGrp="1"/>
+          </p:cNvSpPr>
+          <p:nvPr>
+            <p:ph type="body" idx="3" sz="quarter"/>
+          </p:nvPr>
+        </p:nvSpPr>
+        <p:spPr/>
+        <p:txBody>
+          <a:bodyPr/>
+          <a:lstStyle/>
+          <a:p>
+            <a:r>
+              <a:t>Заметка шаблона: проверить выручку перед отправкой.</a:t>
+            </a:r>
+          </a:p>
+        </p:txBody>
+      </p:sp>
+      <p:sp>
+        <p:nvSpPr>
+          <p:cNvPr id="4" name="Slide Number Placeholder 3"/>
+          <p:cNvSpPr>
+            <a:spLocks noGrp="1"/>
+          </p:cNvSpPr>
+          <p:nvPr>
+            <p:ph type="sldNum" idx="5" sz="quarter"/>
+          </p:nvPr>
+        </p:nvSpPr>
+        <p:spPr/>
+      </p:sp>
+    </p:spTree>
+  </p:cSld>
+  <p:clrMapOvr>
+    <a:masterClrMapping/>
+  </p:clrMapOvr>
+</p:notes>
 </file>
 
 <file path=ppt/slideLayouts/slideLayout1.xml><?xml version="1.0" encoding="utf-8"?>
@@ -690,6 +2617,350 @@
     <p:extLst>
       <p:ext uri="{BB962C8B-B14F-4D97-AF65-F5344CB8AC3E}">
         <p14:creationId xmlns:p14="http://schemas.microsoft.com/office/powerpoint/2010/main" val="3612223792"/>
+      </p:ext>
+    </p:extLst>
+  </p:cSld>
+  <p:clrMapOvr>
+    <a:masterClrMapping/>
+  </p:clrMapOvr>
+</p:sldLayout>
+</file>
+
+<file path=ppt/slideLayouts/slideLayout12.xml><?xml version="1.0" encoding="utf-8"?>
+<p:sldLayout xmlns:a="http://schemas.openxmlformats.org/drawingml/2006/main" xmlns:r="http://schemas.openxmlformats.org/officeDocument/2006/relationships" xmlns:p="http://schemas.openxmlformats.org/presentationml/2006/main" type="titleOnly">
+  <p:cSld name="Только заголовок">
+    <p:spTree>
+      <p:nvGrpSpPr>
+        <p:cNvPr id="1" name=""/>
+        <p:cNvGrpSpPr/>
+        <p:nvPr/>
+      </p:nvGrpSpPr>
+      <p:grpSpPr>
+        <a:xfrm>
+          <a:off x="0" y="0"/>
+          <a:ext cx="0" cy="0"/>
+          <a:chOff x="0" y="0"/>
+          <a:chExt cx="0" cy="0"/>
+        </a:xfrm>
+      </p:grpSpPr>
+      <p:sp>
+        <p:nvSpPr>
+          <p:cNvPr id="2" name="Title 1"/>
+          <p:cNvSpPr>
+            <a:spLocks noGrp="1"/>
+          </p:cNvSpPr>
+          <p:nvPr>
+            <p:ph type="title"/>
+          </p:nvPr>
+        </p:nvSpPr>
+        <p:spPr/>
+        <p:txBody>
+          <a:bodyPr/>
+          <a:lstStyle/>
+          <a:p>
+            <a:r>
+              <a:rPr lang="en-US" smtClean="0"/>
+              <a:t>Click to edit Master title style</a:t>
+            </a:r>
+            <a:endParaRPr lang="en-US"/>
+          </a:p>
+        </p:txBody>
+      </p:sp>
+      <p:sp>
+        <p:nvSpPr>
+          <p:cNvPr id="3" name="Date Placeholder 2"/>
+          <p:cNvSpPr>
+            <a:spLocks noGrp="1"/>
+          </p:cNvSpPr>
+          <p:nvPr>
+            <p:ph type="dt" sz="half" idx="10"/>
+          </p:nvPr>
+        </p:nvSpPr>
+        <p:spPr/>
+        <p:txBody>
+          <a:bodyPr/>
+          <a:lstStyle/>
+          <a:p>
+            <a:fld id="{5BCAD085-E8A6-8845-BD4E-CB4CCA059FC4}" type="datetimeFigureOut">
+              <a:rPr lang="en-US" smtClean="0"/>
+              <a:t>1/27/13</a:t>
+            </a:fld>
+            <a:endParaRPr lang="en-US"/>
+          </a:p>
+        </p:txBody>
+      </p:sp>
+      <p:sp>
+        <p:nvSpPr>
+          <p:cNvPr id="4" name="Footer Placeholder 3"/>
+          <p:cNvSpPr>
+            <a:spLocks noGrp="1"/>
+          </p:cNvSpPr>
+          <p:nvPr>
+            <p:ph type="ftr" sz="quarter" idx="11"/>
+          </p:nvPr>
+        </p:nvSpPr>
+        <p:spPr/>
+        <p:txBody>
+          <a:bodyPr/>
+          <a:lstStyle/>
+          <a:p>
+            <a:endParaRPr lang="en-US"/>
+          </a:p>
+        </p:txBody>
+      </p:sp>
+      <p:sp>
+        <p:nvSpPr>
+          <p:cNvPr id="5" name="Slide Number Placeholder 4"/>
+          <p:cNvSpPr>
+            <a:spLocks noGrp="1"/>
+          </p:cNvSpPr>
+          <p:nvPr>
+            <p:ph type="sldNum" sz="quarter" idx="12"/>
+          </p:nvPr>
+        </p:nvSpPr>
+        <p:spPr/>
+        <p:txBody>
+          <a:bodyPr/>
+          <a:lstStyle/>
+          <a:p>
+            <a:fld id="{C1FF6DA9-008F-8B48-92A6-B652298478BF}" type="slidenum">
+              <a:rPr lang="en-US" smtClean="0"/>
+              <a:t>‹#›</a:t>
+            </a:fld>
+            <a:endParaRPr lang="en-US"/>
+          </a:p>
+        </p:txBody>
+      </p:sp>
+    </p:spTree>
+    <p:extLst>
+      <p:ext uri="{BB962C8B-B14F-4D97-AF65-F5344CB8AC3E}">
+        <p14:creationId xmlns:p14="http://schemas.microsoft.com/office/powerpoint/2010/main" val="727027711"/>
+      </p:ext>
+    </p:extLst>
+  </p:cSld>
+  <p:clrMapOvr>
+    <a:masterClrMapping/>
+  </p:clrMapOvr>
+</p:sldLayout>
+</file>
+
+<file path=ppt/slideLayouts/slideLayout13.xml><?xml version="1.0" encoding="utf-8"?>
+<p:sldLayout xmlns:a="http://schemas.openxmlformats.org/drawingml/2006/main" xmlns:r="http://schemas.openxmlformats.org/officeDocument/2006/relationships" xmlns:p="http://schemas.openxmlformats.org/presentationml/2006/main" type="blank" preserve="1">
+  <p:cSld name="Последний">
+    <p:spTree>
+      <p:nvGrpSpPr>
+        <p:cNvPr id="1" name=""/>
+        <p:cNvGrpSpPr/>
+        <p:nvPr/>
+      </p:nvGrpSpPr>
+      <p:grpSpPr>
+        <a:xfrm>
+          <a:off x="0" y="0"/>
+          <a:ext cx="0" cy="0"/>
+          <a:chOff x="0" y="0"/>
+          <a:chExt cx="0" cy="0"/>
+        </a:xfrm>
+      </p:grpSpPr>
+      <p:grpSp>
+        <p:nvGrpSpPr>
+          <p:cNvPr id="2" name="Логотип"/>
+          <p:cNvGrpSpPr/>
+          <p:nvPr/>
+        </p:nvGrpSpPr>
+        <p:grpSpPr>
+          <a:xfrm>
+            <a:off x="4754880" y="2926080"/>
+            <a:ext cx="2560320" cy="457200"/>
+            <a:chOff x="4754880" y="2926080"/>
+            <a:chExt cx="2560320" cy="457200"/>
+          </a:xfrm>
+        </p:grpSpPr>
+        <p:sp>
+          <p:nvSpPr>
+            <p:cNvPr id="3" name="Rounded Rectangle 2"/>
+            <p:cNvSpPr/>
+            <p:nvPr/>
+          </p:nvSpPr>
+          <p:spPr>
+            <a:xfrm>
+              <a:off x="4754880" y="2926080"/>
+              <a:ext cx="457200" cy="457200"/>
+            </a:xfrm>
+            <a:prstGeom prst="roundRect">
+              <a:avLst/>
+            </a:prstGeom>
+            <a:solidFill>
+              <a:srgbClr val="F28C28"/>
+            </a:solidFill>
+            <a:ln>
+              <a:noFill/>
+            </a:ln>
+          </p:spPr>
+          <p:style>
+            <a:lnRef idx="1">
+              <a:schemeClr val="accent1"/>
+            </a:lnRef>
+            <a:fillRef idx="3">
+              <a:schemeClr val="accent1"/>
+            </a:fillRef>
+            <a:effectRef idx="2">
+              <a:schemeClr val="accent1"/>
+            </a:effectRef>
+            <a:fontRef idx="minor">
+              <a:schemeClr val="lt1"/>
+            </a:fontRef>
+          </p:style>
+          <p:txBody>
+            <a:bodyPr rtlCol="0" anchor="ctr"/>
+            <a:lstStyle/>
+            <a:p>
+              <a:pPr algn="ctr"/>
+            </a:p>
+          </p:txBody>
+        </p:sp>
+        <p:sp>
+          <p:nvSpPr>
+            <p:cNvPr id="4" name="TextBox 3"/>
+            <p:cNvSpPr txBox="1"/>
+            <p:nvPr/>
+          </p:nvSpPr>
+          <p:spPr>
+            <a:xfrm>
+              <a:off x="5303520" y="2971800"/>
+              <a:ext cx="2011680" cy="365760"/>
+            </a:xfrm>
+            <a:prstGeom prst="rect">
+              <a:avLst/>
+            </a:prstGeom>
+            <a:noFill/>
+          </p:spPr>
+          <p:txBody>
+            <a:bodyPr wrap="none">
+              <a:spAutoFit/>
+            </a:bodyPr>
+            <a:lstStyle/>
+            <a:p>
+              <a:r>
+                <a:rPr sz="1800" b="1">
+                  <a:solidFill>
+                    <a:srgbClr val="1F4E79"/>
+                  </a:solidFill>
+                </a:rPr>
+                <a:t>Синтетика</a:t>
+              </a:r>
+            </a:p>
+          </p:txBody>
+        </p:sp>
+      </p:grpSp>
+    </p:spTree>
+    <p:extLst>
+      <p:ext uri="{BB962C8B-B14F-4D97-AF65-F5344CB8AC3E}">
+        <p14:creationId xmlns:p14="http://schemas.microsoft.com/office/powerpoint/2010/main" val="1212999818"/>
+      </p:ext>
+    </p:extLst>
+  </p:cSld>
+  <p:clrMapOvr>
+    <a:masterClrMapping/>
+  </p:clrMapOvr>
+</p:sldLayout>
+</file>
+
+<file path=ppt/slideLayouts/slideLayout14.xml><?xml version="1.0" encoding="utf-8"?>
+<p:sldLayout xmlns:a="http://schemas.openxmlformats.org/drawingml/2006/main" xmlns:r="http://schemas.openxmlformats.org/officeDocument/2006/relationships" xmlns:p="http://schemas.openxmlformats.org/presentationml/2006/main" type="obj">
+  <p:cSld name="Заголовок и объект">
+    <p:spTree>
+      <p:nvGrpSpPr>
+        <p:cNvPr id="1" name=""/>
+        <p:cNvGrpSpPr/>
+        <p:nvPr/>
+      </p:nvGrpSpPr>
+      <p:grpSpPr>
+        <a:xfrm>
+          <a:off x="0" y="0"/>
+          <a:ext cx="0" cy="0"/>
+          <a:chOff x="0" y="0"/>
+          <a:chExt cx="0" cy="0"/>
+        </a:xfrm>
+      </p:grpSpPr>
+      <p:sp>
+        <p:nvSpPr>
+          <p:cNvPr id="2" name="Title 1"/>
+          <p:cNvSpPr>
+            <a:spLocks noGrp="1"/>
+          </p:cNvSpPr>
+          <p:nvPr>
+            <p:ph type="title"/>
+          </p:nvPr>
+        </p:nvSpPr>
+        <p:spPr/>
+        <p:txBody>
+          <a:bodyPr/>
+          <a:lstStyle/>
+          <a:p>
+            <a:r>
+              <a:rPr lang="en-US" smtClean="0"/>
+              <a:t>Click to edit Master title style</a:t>
+            </a:r>
+            <a:endParaRPr lang="en-US"/>
+          </a:p>
+        </p:txBody>
+      </p:sp>
+      <p:sp>
+        <p:nvSpPr>
+          <p:cNvPr id="3" name="Content Placeholder 2"/>
+          <p:cNvSpPr>
+            <a:spLocks noGrp="1"/>
+          </p:cNvSpPr>
+          <p:nvPr>
+            <p:ph idx="1"/>
+          </p:nvPr>
+        </p:nvSpPr>
+        <p:spPr/>
+        <p:txBody>
+          <a:bodyPr/>
+          <a:lstStyle/>
+          <a:p>
+            <a:pPr lvl="0"/>
+            <a:r>
+              <a:rPr lang="en-US" smtClean="0"/>
+              <a:t>Click to edit Master text styles</a:t>
+            </a:r>
+          </a:p>
+          <a:p>
+            <a:pPr lvl="1"/>
+            <a:r>
+              <a:rPr lang="en-US" smtClean="0"/>
+              <a:t>Second level</a:t>
+            </a:r>
+          </a:p>
+          <a:p>
+            <a:pPr lvl="2"/>
+            <a:r>
+              <a:rPr lang="en-US" smtClean="0"/>
+              <a:t>Third level</a:t>
+            </a:r>
+          </a:p>
+          <a:p>
+            <a:pPr lvl="3"/>
+            <a:r>
+              <a:rPr lang="en-US" smtClean="0"/>
+              <a:t>Fourth level</a:t>
+            </a:r>
+          </a:p>
+          <a:p>
+            <a:pPr lvl="4"/>
+            <a:r>
+              <a:rPr lang="en-US" smtClean="0"/>
+              <a:t>Fifth level</a:t>
+            </a:r>
+            <a:endParaRPr lang="en-US"/>
+          </a:p>
+        </p:txBody>
+      </p:sp>
+    </p:spTree>
+    <p:extLst>
+      <p:ext uri="{BB962C8B-B14F-4D97-AF65-F5344CB8AC3E}">
+        <p14:creationId xmlns:p14="http://schemas.microsoft.com/office/powerpoint/2010/main" val="2614314258"/>
       </p:ext>
     </p:extLst>
   </p:cSld>
@@ -3154,6 +5425,403 @@
 </p:sldMaster>
 </file>
 
+<file path=ppt/slideMasters/slideMaster2.xml><?xml version="1.0" encoding="utf-8"?>
+<p:sldMaster xmlns:a="http://schemas.openxmlformats.org/drawingml/2006/main" xmlns:r="http://schemas.openxmlformats.org/officeDocument/2006/relationships" xmlns:p="http://schemas.openxmlformats.org/presentationml/2006/main">
+  <p:cSld>
+    <p:bg>
+      <p:bgRef idx="1001">
+        <a:schemeClr val="bg1"/>
+      </p:bgRef>
+    </p:bg>
+    <p:spTree>
+      <p:nvGrpSpPr>
+        <p:cNvPr id="1" name=""/>
+        <p:cNvGrpSpPr/>
+        <p:nvPr/>
+      </p:nvGrpSpPr>
+      <p:grpSpPr>
+        <a:xfrm>
+          <a:off x="0" y="0"/>
+          <a:ext cx="0" cy="0"/>
+          <a:chOff x="0" y="0"/>
+          <a:chExt cx="0" cy="0"/>
+        </a:xfrm>
+      </p:grpSpPr>
+      <p:sp>
+        <p:nvSpPr>
+          <p:cNvPr id="2" name="Title Placeholder 1"/>
+          <p:cNvSpPr>
+            <a:spLocks noGrp="1"/>
+          </p:cNvSpPr>
+          <p:nvPr>
+            <p:ph type="title"/>
+          </p:nvPr>
+        </p:nvSpPr>
+        <p:spPr>
+          <a:xfrm>
+            <a:off x="609584" y="274638"/>
+            <a:ext cx="10972525" cy="1143000"/>
+          </a:xfrm>
+          <a:prstGeom prst="rect">
+            <a:avLst/>
+          </a:prstGeom>
+        </p:spPr>
+        <p:txBody>
+          <a:bodyPr vert="horz" lIns="91440" tIns="45720" rIns="91440" bIns="45720" rtlCol="0" anchor="ctr">
+            <a:normAutofit/>
+          </a:bodyPr>
+          <a:lstStyle/>
+          <a:p>
+            <a:r>
+              <a:rPr lang="en-US" smtClean="0"/>
+              <a:t>Click to edit Master title style</a:t>
+            </a:r>
+            <a:endParaRPr lang="en-US"/>
+          </a:p>
+        </p:txBody>
+      </p:sp>
+      <p:sp>
+        <p:nvSpPr>
+          <p:cNvPr id="2" name="Полоса шаблона"/>
+          <p:cNvSpPr/>
+          <p:nvPr/>
+        </p:nvSpPr>
+        <p:spPr>
+          <a:xfrm>
+            <a:off x="0" y="0"/>
+            <a:ext cx="12191695" cy="164592"/>
+          </a:xfrm>
+          <a:prstGeom prst="rect">
+            <a:avLst/>
+          </a:prstGeom>
+          <a:solidFill>
+            <a:srgbClr val="1F4E79"/>
+          </a:solidFill>
+          <a:ln>
+            <a:noFill/>
+          </a:ln>
+        </p:spPr>
+        <p:style>
+          <a:lnRef idx="1">
+            <a:schemeClr val="accent1"/>
+          </a:lnRef>
+          <a:fillRef idx="3">
+            <a:schemeClr val="accent1"/>
+          </a:fillRef>
+          <a:effectRef idx="2">
+            <a:schemeClr val="accent1"/>
+          </a:effectRef>
+          <a:fontRef idx="minor">
+            <a:schemeClr val="lt1"/>
+          </a:fontRef>
+        </p:style>
+        <p:txBody>
+          <a:bodyPr rtlCol="0" anchor="ctr"/>
+          <a:lstStyle/>
+          <a:p>
+            <a:pPr algn="ctr"/>
+          </a:p>
+        </p:txBody>
+      </p:sp>
+      <p:sp>
+        <p:nvSpPr>
+          <p:cNvPr id="3" name="Подпись шаблона"/>
+          <p:cNvSpPr txBox="1"/>
+          <p:nvPr/>
+        </p:nvSpPr>
+        <p:spPr>
+          <a:xfrm>
+            <a:off x="457200" y="6446520"/>
+            <a:ext cx="5486400" cy="320040"/>
+          </a:xfrm>
+          <a:prstGeom prst="rect">
+            <a:avLst/>
+          </a:prstGeom>
+          <a:noFill/>
+        </p:spPr>
+        <p:txBody>
+          <a:bodyPr wrap="square">
+            <a:noAutofit/>
+          </a:bodyPr>
+          <a:lstStyle/>
+          <a:p>
+            <a:r>
+              <a:rPr sz="1000">
+                <a:solidFill>
+                  <a:srgbClr val="7F7F7F"/>
+                </a:solidFill>
+              </a:rPr>
+              <a:t>Синтетический шаблон Autogenerator</a:t>
+            </a:r>
+          </a:p>
+        </p:txBody>
+      </p:sp>
+    </p:spTree>
+    <p:extLst>
+      <p:ext uri="{BB962C8B-B14F-4D97-AF65-F5344CB8AC3E}">
+        <p14:creationId xmlns:p14="http://schemas.microsoft.com/office/powerpoint/2010/main" val="2209977519"/>
+      </p:ext>
+    </p:extLst>
+  </p:cSld>
+  <p:clrMap bg1="lt1" tx1="dk1" bg2="lt2" tx2="dk2" accent1="accent1" accent2="accent2" accent3="accent3" accent4="accent4" accent5="accent5" accent6="accent6" hlink="hlink" folHlink="folHlink"/>
+  <p:sldLayoutIdLst>
+    <p:sldLayoutId id="2147483661" r:id="rId2"/>
+    <p:sldLayoutId id="2147483662" r:id="rId3"/>
+    <p:sldLayoutId id="2147483663" r:id="rId4"/>
+  </p:sldLayoutIdLst>
+  <p:txStyles>
+    <p:titleStyle>
+      <a:lvl1pPr algn="ctr" defTabSz="457200" rtl="0" eaLnBrk="1" latinLnBrk="0" hangingPunct="1">
+        <a:spcBef>
+          <a:spcPct val="0"/>
+        </a:spcBef>
+        <a:buNone/>
+        <a:defRPr sz="4400" kern="1200">
+          <a:solidFill>
+            <a:schemeClr val="tx1"/>
+          </a:solidFill>
+          <a:latin typeface="+mj-lt"/>
+          <a:ea typeface="+mj-ea"/>
+          <a:cs typeface="+mj-cs"/>
+        </a:defRPr>
+      </a:lvl1pPr>
+    </p:titleStyle>
+    <p:bodyStyle>
+      <a:lvl1pPr marL="342900" indent="-342900" algn="l" defTabSz="457200" rtl="0" eaLnBrk="1" latinLnBrk="0" hangingPunct="1">
+        <a:spcBef>
+          <a:spcPct val="20000"/>
+        </a:spcBef>
+        <a:buFont typeface="Arial"/>
+        <a:buChar char="•"/>
+        <a:defRPr sz="3200" kern="1200">
+          <a:solidFill>
+            <a:schemeClr val="tx1"/>
+          </a:solidFill>
+          <a:latin typeface="+mn-lt"/>
+          <a:ea typeface="+mn-ea"/>
+          <a:cs typeface="+mn-cs"/>
+        </a:defRPr>
+      </a:lvl1pPr>
+      <a:lvl2pPr marL="742950" indent="-285750" algn="l" defTabSz="457200" rtl="0" eaLnBrk="1" latinLnBrk="0" hangingPunct="1">
+        <a:spcBef>
+          <a:spcPct val="20000"/>
+        </a:spcBef>
+        <a:buFont typeface="Arial"/>
+        <a:buChar char="–"/>
+        <a:defRPr sz="2800" kern="1200">
+          <a:solidFill>
+            <a:schemeClr val="tx1"/>
+          </a:solidFill>
+          <a:latin typeface="+mn-lt"/>
+          <a:ea typeface="+mn-ea"/>
+          <a:cs typeface="+mn-cs"/>
+        </a:defRPr>
+      </a:lvl2pPr>
+      <a:lvl3pPr marL="1143000" indent="-228600" algn="l" defTabSz="457200" rtl="0" eaLnBrk="1" latinLnBrk="0" hangingPunct="1">
+        <a:spcBef>
+          <a:spcPct val="20000"/>
+        </a:spcBef>
+        <a:buFont typeface="Arial"/>
+        <a:buChar char="•"/>
+        <a:defRPr sz="2400" kern="1200">
+          <a:solidFill>
+            <a:schemeClr val="tx1"/>
+          </a:solidFill>
+          <a:latin typeface="+mn-lt"/>
+          <a:ea typeface="+mn-ea"/>
+          <a:cs typeface="+mn-cs"/>
+        </a:defRPr>
+      </a:lvl3pPr>
+      <a:lvl4pPr marL="1600200" indent="-228600" algn="l" defTabSz="457200" rtl="0" eaLnBrk="1" latinLnBrk="0" hangingPunct="1">
+        <a:spcBef>
+          <a:spcPct val="20000"/>
+        </a:spcBef>
+        <a:buFont typeface="Arial"/>
+        <a:buChar char="–"/>
+        <a:defRPr sz="2000" kern="1200">
+          <a:solidFill>
+            <a:schemeClr val="tx1"/>
+          </a:solidFill>
+          <a:latin typeface="+mn-lt"/>
+          <a:ea typeface="+mn-ea"/>
+          <a:cs typeface="+mn-cs"/>
+        </a:defRPr>
+      </a:lvl4pPr>
+      <a:lvl5pPr marL="2057400" indent="-228600" algn="l" defTabSz="457200" rtl="0" eaLnBrk="1" latinLnBrk="0" hangingPunct="1">
+        <a:spcBef>
+          <a:spcPct val="20000"/>
+        </a:spcBef>
+        <a:buFont typeface="Arial"/>
+        <a:buChar char="»"/>
+        <a:defRPr sz="2000" kern="1200">
+          <a:solidFill>
+            <a:schemeClr val="tx1"/>
+          </a:solidFill>
+          <a:latin typeface="+mn-lt"/>
+          <a:ea typeface="+mn-ea"/>
+          <a:cs typeface="+mn-cs"/>
+        </a:defRPr>
+      </a:lvl5pPr>
+      <a:lvl6pPr marL="2514600" indent="-228600" algn="l" defTabSz="457200" rtl="0" eaLnBrk="1" latinLnBrk="0" hangingPunct="1">
+        <a:spcBef>
+          <a:spcPct val="20000"/>
+        </a:spcBef>
+        <a:buFont typeface="Arial"/>
+        <a:buChar char="•"/>
+        <a:defRPr sz="2000" kern="1200">
+          <a:solidFill>
+            <a:schemeClr val="tx1"/>
+          </a:solidFill>
+          <a:latin typeface="+mn-lt"/>
+          <a:ea typeface="+mn-ea"/>
+          <a:cs typeface="+mn-cs"/>
+        </a:defRPr>
+      </a:lvl6pPr>
+      <a:lvl7pPr marL="2971800" indent="-228600" algn="l" defTabSz="457200" rtl="0" eaLnBrk="1" latinLnBrk="0" hangingPunct="1">
+        <a:spcBef>
+          <a:spcPct val="20000"/>
+        </a:spcBef>
+        <a:buFont typeface="Arial"/>
+        <a:buChar char="•"/>
+        <a:defRPr sz="2000" kern="1200">
+          <a:solidFill>
+            <a:schemeClr val="tx1"/>
+          </a:solidFill>
+          <a:latin typeface="+mn-lt"/>
+          <a:ea typeface="+mn-ea"/>
+          <a:cs typeface="+mn-cs"/>
+        </a:defRPr>
+      </a:lvl7pPr>
+      <a:lvl8pPr marL="3429000" indent="-228600" algn="l" defTabSz="457200" rtl="0" eaLnBrk="1" latinLnBrk="0" hangingPunct="1">
+        <a:spcBef>
+          <a:spcPct val="20000"/>
+        </a:spcBef>
+        <a:buFont typeface="Arial"/>
+        <a:buChar char="•"/>
+        <a:defRPr sz="2000" kern="1200">
+          <a:solidFill>
+            <a:schemeClr val="tx1"/>
+          </a:solidFill>
+          <a:latin typeface="+mn-lt"/>
+          <a:ea typeface="+mn-ea"/>
+          <a:cs typeface="+mn-cs"/>
+        </a:defRPr>
+      </a:lvl8pPr>
+      <a:lvl9pPr marL="3886200" indent="-228600" algn="l" defTabSz="457200" rtl="0" eaLnBrk="1" latinLnBrk="0" hangingPunct="1">
+        <a:spcBef>
+          <a:spcPct val="20000"/>
+        </a:spcBef>
+        <a:buFont typeface="Arial"/>
+        <a:buChar char="•"/>
+        <a:defRPr sz="2000" kern="1200">
+          <a:solidFill>
+            <a:schemeClr val="tx1"/>
+          </a:solidFill>
+          <a:latin typeface="+mn-lt"/>
+          <a:ea typeface="+mn-ea"/>
+          <a:cs typeface="+mn-cs"/>
+        </a:defRPr>
+      </a:lvl9pPr>
+    </p:bodyStyle>
+    <p:otherStyle>
+      <a:defPPr>
+        <a:defRPr lang="en-US"/>
+      </a:defPPr>
+      <a:lvl1pPr marL="0" algn="l" defTabSz="457200" rtl="0" eaLnBrk="1" latinLnBrk="0" hangingPunct="1">
+        <a:defRPr sz="1800" kern="1200">
+          <a:solidFill>
+            <a:schemeClr val="tx1"/>
+          </a:solidFill>
+          <a:latin typeface="+mn-lt"/>
+          <a:ea typeface="+mn-ea"/>
+          <a:cs typeface="+mn-cs"/>
+        </a:defRPr>
+      </a:lvl1pPr>
+      <a:lvl2pPr marL="457200" algn="l" defTabSz="457200" rtl="0" eaLnBrk="1" latinLnBrk="0" hangingPunct="1">
+        <a:defRPr sz="1800" kern="1200">
+          <a:solidFill>
+            <a:schemeClr val="tx1"/>
+          </a:solidFill>
+          <a:latin typeface="+mn-lt"/>
+          <a:ea typeface="+mn-ea"/>
+          <a:cs typeface="+mn-cs"/>
+        </a:defRPr>
+      </a:lvl2pPr>
+      <a:lvl3pPr marL="914400" algn="l" defTabSz="457200" rtl="0" eaLnBrk="1" latinLnBrk="0" hangingPunct="1">
+        <a:defRPr sz="1800" kern="1200">
+          <a:solidFill>
+            <a:schemeClr val="tx1"/>
+          </a:solidFill>
+          <a:latin typeface="+mn-lt"/>
+          <a:ea typeface="+mn-ea"/>
+          <a:cs typeface="+mn-cs"/>
+        </a:defRPr>
+      </a:lvl3pPr>
+      <a:lvl4pPr marL="1371600" algn="l" defTabSz="457200" rtl="0" eaLnBrk="1" latinLnBrk="0" hangingPunct="1">
+        <a:defRPr sz="1800" kern="1200">
+          <a:solidFill>
+            <a:schemeClr val="tx1"/>
+          </a:solidFill>
+          <a:latin typeface="+mn-lt"/>
+          <a:ea typeface="+mn-ea"/>
+          <a:cs typeface="+mn-cs"/>
+        </a:defRPr>
+      </a:lvl4pPr>
+      <a:lvl5pPr marL="1828800" algn="l" defTabSz="457200" rtl="0" eaLnBrk="1" latinLnBrk="0" hangingPunct="1">
+        <a:defRPr sz="1800" kern="1200">
+          <a:solidFill>
+            <a:schemeClr val="tx1"/>
+          </a:solidFill>
+          <a:latin typeface="+mn-lt"/>
+          <a:ea typeface="+mn-ea"/>
+          <a:cs typeface="+mn-cs"/>
+        </a:defRPr>
+      </a:lvl5pPr>
+      <a:lvl6pPr marL="2286000" algn="l" defTabSz="457200" rtl="0" eaLnBrk="1" latinLnBrk="0" hangingPunct="1">
+        <a:defRPr sz="1800" kern="1200">
+          <a:solidFill>
+            <a:schemeClr val="tx1"/>
+          </a:solidFill>
+          <a:latin typeface="+mn-lt"/>
+          <a:ea typeface="+mn-ea"/>
+          <a:cs typeface="+mn-cs"/>
+        </a:defRPr>
+      </a:lvl6pPr>
+      <a:lvl7pPr marL="2743200" algn="l" defTabSz="457200" rtl="0" eaLnBrk="1" latinLnBrk="0" hangingPunct="1">
+        <a:defRPr sz="1800" kern="1200">
+          <a:solidFill>
+            <a:schemeClr val="tx1"/>
+          </a:solidFill>
+          <a:latin typeface="+mn-lt"/>
+          <a:ea typeface="+mn-ea"/>
+          <a:cs typeface="+mn-cs"/>
+        </a:defRPr>
+      </a:lvl7pPr>
+      <a:lvl8pPr marL="3200400" algn="l" defTabSz="457200" rtl="0" eaLnBrk="1" latinLnBrk="0" hangingPunct="1">
+        <a:defRPr sz="1800" kern="1200">
+          <a:solidFill>
+            <a:schemeClr val="tx1"/>
+          </a:solidFill>
+          <a:latin typeface="+mn-lt"/>
+          <a:ea typeface="+mn-ea"/>
+          <a:cs typeface="+mn-cs"/>
+        </a:defRPr>
+      </a:lvl8pPr>
+      <a:lvl9pPr marL="3657600" algn="l" defTabSz="457200" rtl="0" eaLnBrk="1" latinLnBrk="0" hangingPunct="1">
+        <a:defRPr sz="1800" kern="1200">
+          <a:solidFill>
+            <a:schemeClr val="tx1"/>
+          </a:solidFill>
+          <a:latin typeface="+mn-lt"/>
+          <a:ea typeface="+mn-ea"/>
+          <a:cs typeface="+mn-cs"/>
+        </a:defRPr>
+      </a:lvl9pPr>
+    </p:otherStyle>
+  </p:txStyles>
+</p:sldMaster>
+</file>
+
 <file path=ppt/slides/slide1.xml><?xml version="1.0" encoding="utf-8"?>
 <p:sld xmlns:a="http://schemas.openxmlformats.org/drawingml/2006/main" xmlns:p="http://schemas.openxmlformats.org/presentationml/2006/main" xmlns:r="http://schemas.openxmlformats.org/officeDocument/2006/relationships">
   <p:cSld>
@@ -3171,7 +5839,7 @@
             <a:spLocks noGrp="1"/>
           </p:cNvSpPr>
           <p:nvPr>
-            <p:ph type="title"/>
+            <p:ph type="ctrTitle"/>
           </p:nvPr>
         </p:nvSpPr>
         <p:spPr/>
@@ -3180,21 +5848,21 @@
           <a:lstStyle/>
           <a:p>
             <a:r>
-              <a:t>Образец: продажи за {{Месяц}} {{Год}}</a:t>
-            </a:r>
-          </a:p>
-        </p:txBody>
-      </p:sp>
-      <p:sp>
-        <p:nvSpPr>
-          <p:cNvPr id="3" name="TextBox 2"/>
+              <a:t>Продажи</a:t>
+            </a:r>
+          </a:p>
+        </p:txBody>
+      </p:sp>
+      <p:sp>
+        <p:nvSpPr>
+          <p:cNvPr id="3" name="Период"/>
           <p:cNvSpPr txBox="1"/>
           <p:nvPr/>
         </p:nvSpPr>
         <p:spPr>
           <a:xfrm>
-            <a:off x="548640" y="1828800"/>
-            <a:ext cx="7315200" cy="914400"/>
+            <a:off x="3200400" y="4023360"/>
+            <a:ext cx="5760720" cy="731520"/>
           </a:xfrm>
           <a:prstGeom prst="rect">
             <a:avLst/>
@@ -3202,23 +5870,2218 @@
           <a:noFill/>
         </p:spPr>
         <p:txBody>
-          <a:bodyPr wrap="none">
-            <a:spAutoFit/>
+          <a:bodyPr wrap="square">
+            <a:noAutofit/>
           </a:bodyPr>
           <a:lstStyle/>
           <a:p>
-            <a:r>
-              <a:t>Выручка {{Выручка}} млн ₽, {{Прирост+}} к прошлому месяцу</a:t>
-            </a:r>
-          </a:p>
-        </p:txBody>
-      </p:sp>
+            <a:pPr algn="ctr"/>
+            <a:r>
+              <a:rPr lang="en-US" sz="2800" b="0">
+                <a:solidFill>
+                  <a:srgbClr val="2B2F47"/>
+                </a:solidFill>
+                <a:latin typeface="Arial"/>
+              </a:rPr>
+              <a:t>{{</a:t>
+            </a:r>
+            <a:r>
+              <a:rPr lang="en-US" err="1" sz="2800" b="0">
+                <a:solidFill>
+                  <a:srgbClr val="2B2F47"/>
+                </a:solidFill>
+                <a:latin typeface="Arial"/>
+              </a:rPr>
+              <a:t>Ме</a:t>
+            </a:r>
+            <a:r>
+              <a:rPr lang="ru-RU" sz="2800" b="0">
+                <a:solidFill>
+                  <a:srgbClr val="2B2F47"/>
+                </a:solidFill>
+                <a:latin typeface="Arial"/>
+              </a:rPr>
+              <a:t>сяц</a:t>
+            </a:r>
+            <a:r>
+              <a:rPr lang="en-US" sz="2800" b="0">
+                <a:solidFill>
+                  <a:srgbClr val="2B2F47"/>
+                </a:solidFill>
+                <a:latin typeface="Arial"/>
+              </a:rPr>
+              <a:t>}}</a:t>
+            </a:r>
+            <a:r>
+              <a:rPr lang="ru-RU" sz="2800" b="0">
+                <a:solidFill>
+                  <a:srgbClr val="2B2F47"/>
+                </a:solidFill>
+                <a:latin typeface="Arial"/>
+              </a:rPr>
+              <a:t> </a:t>
+            </a:r>
+            <a:r>
+              <a:rPr lang="en-US" sz="2800" b="0">
+                <a:solidFill>
+                  <a:srgbClr val="2B2F47"/>
+                </a:solidFill>
+                <a:latin typeface="Arial"/>
+              </a:rPr>
+              <a:t>{{</a:t>
+            </a:r>
+            <a:r>
+              <a:rPr lang="ru-RU" sz="2800" b="0">
+                <a:solidFill>
+                  <a:srgbClr val="2B2F47"/>
+                </a:solidFill>
+                <a:latin typeface="Arial"/>
+              </a:rPr>
+              <a:t>Год</a:t>
+            </a:r>
+            <a:r>
+              <a:rPr lang="en-US" sz="2800" b="0">
+                <a:solidFill>
+                  <a:srgbClr val="2B2F47"/>
+                </a:solidFill>
+                <a:latin typeface="Arial"/>
+              </a:rPr>
+              <a:t>}}</a:t>
+            </a:r>
+          </a:p>
+        </p:txBody>
+      </p:sp>
+      <p:grpSp>
+        <p:nvGrpSpPr>
+          <p:cNvPr id="4" name="Логотип"/>
+          <p:cNvGrpSpPr/>
+          <p:nvPr/>
+        </p:nvGrpSpPr>
+        <p:grpSpPr>
+          <a:xfrm>
+            <a:off x="4754880" y="5669280"/>
+            <a:ext cx="2560320" cy="457200"/>
+            <a:chOff x="4754880" y="5669280"/>
+            <a:chExt cx="2560320" cy="457200"/>
+          </a:xfrm>
+        </p:grpSpPr>
+        <p:sp>
+          <p:nvSpPr>
+            <p:cNvPr id="5" name="Rounded Rectangle 4"/>
+            <p:cNvSpPr/>
+            <p:nvPr/>
+          </p:nvSpPr>
+          <p:spPr>
+            <a:xfrm>
+              <a:off x="4754880" y="5669280"/>
+              <a:ext cx="457200" cy="457200"/>
+            </a:xfrm>
+            <a:prstGeom prst="roundRect">
+              <a:avLst/>
+            </a:prstGeom>
+            <a:solidFill>
+              <a:srgbClr val="F28C28"/>
+            </a:solidFill>
+            <a:ln>
+              <a:noFill/>
+            </a:ln>
+          </p:spPr>
+          <p:style>
+            <a:lnRef idx="1">
+              <a:schemeClr val="accent1"/>
+            </a:lnRef>
+            <a:fillRef idx="3">
+              <a:schemeClr val="accent1"/>
+            </a:fillRef>
+            <a:effectRef idx="2">
+              <a:schemeClr val="accent1"/>
+            </a:effectRef>
+            <a:fontRef idx="minor">
+              <a:schemeClr val="lt1"/>
+            </a:fontRef>
+          </p:style>
+          <p:txBody>
+            <a:bodyPr rtlCol="0" anchor="ctr"/>
+            <a:lstStyle/>
+            <a:p>
+              <a:pPr algn="ctr"/>
+            </a:p>
+          </p:txBody>
+        </p:sp>
+        <p:sp>
+          <p:nvSpPr>
+            <p:cNvPr id="6" name="TextBox 5"/>
+            <p:cNvSpPr txBox="1"/>
+            <p:nvPr/>
+          </p:nvSpPr>
+          <p:spPr>
+            <a:xfrm>
+              <a:off x="5303520" y="5715000"/>
+              <a:ext cx="2011680" cy="365760"/>
+            </a:xfrm>
+            <a:prstGeom prst="rect">
+              <a:avLst/>
+            </a:prstGeom>
+            <a:noFill/>
+          </p:spPr>
+          <p:txBody>
+            <a:bodyPr wrap="none">
+              <a:spAutoFit/>
+            </a:bodyPr>
+            <a:lstStyle/>
+            <a:p>
+              <a:r>
+                <a:rPr sz="1800" b="1">
+                  <a:solidFill>
+                    <a:srgbClr val="1F4E79"/>
+                  </a:solidFill>
+                </a:rPr>
+                <a:t>Синтетика</a:t>
+              </a:r>
+            </a:p>
+          </p:txBody>
+        </p:sp>
+      </p:grpSp>
     </p:spTree>
   </p:cSld>
   <p:clrMapOvr>
     <a:masterClrMapping/>
   </p:clrMapOvr>
 </p:sld>
+</file>
+
+<file path=ppt/slides/slide2.xml><?xml version="1.0" encoding="utf-8"?>
+<p:sld xmlns:a="http://schemas.openxmlformats.org/drawingml/2006/main" xmlns:p="http://schemas.openxmlformats.org/presentationml/2006/main" xmlns:r="http://schemas.openxmlformats.org/officeDocument/2006/relationships">
+  <p:cSld>
+    <p:spTree>
+      <p:nvGrpSpPr>
+        <p:cNvPr id="1" name=""/>
+        <p:cNvGrpSpPr/>
+        <p:nvPr/>
+      </p:nvGrpSpPr>
+      <p:grpSpPr/>
+      <p:sp>
+        <p:nvSpPr>
+          <p:cNvPr id="2" name="Заголовок 1"/>
+          <p:cNvSpPr txBox="1"/>
+          <p:nvPr/>
+        </p:nvSpPr>
+        <p:spPr>
+          <a:xfrm>
+            <a:off x="457200" y="320040"/>
+            <a:ext cx="11247120" cy="731520"/>
+          </a:xfrm>
+          <a:prstGeom prst="rect">
+            <a:avLst/>
+          </a:prstGeom>
+          <a:noFill/>
+        </p:spPr>
+        <p:txBody>
+          <a:bodyPr wrap="square">
+            <a:noAutofit/>
+          </a:bodyPr>
+          <a:lstStyle/>
+          <a:p>
+            <a:pPr algn="ctr"/>
+            <a:r>
+              <a:rPr lang="ru-RU" sz="2800" b="1">
+                <a:solidFill>
+                  <a:srgbClr val="2B2F47"/>
+                </a:solidFill>
+                <a:latin typeface="Arial"/>
+              </a:rPr>
+              <a:t>Итоги</a:t>
+            </a:r>
+            <a:r>
+              <a:rPr lang="en-US" sz="2800" b="1">
+                <a:solidFill>
+                  <a:srgbClr val="2B2F47"/>
+                </a:solidFill>
+                <a:latin typeface="Arial"/>
+              </a:rPr>
+              <a:t>, </a:t>
+            </a:r>
+            <a:r>
+              <a:rPr lang="en-US" sz="2800" b="1">
+                <a:solidFill>
+                  <a:srgbClr val="2B2F47"/>
+                </a:solidFill>
+                <a:latin typeface="Arial"/>
+              </a:rPr>
+              <a:t>{</a:t>
+            </a:r>
+            <a:r>
+              <a:rPr lang="ru-RU" sz="2800" b="1">
+                <a:solidFill>
+                  <a:srgbClr val="2B2F47"/>
+                </a:solidFill>
+                <a:latin typeface="Arial"/>
+              </a:rPr>
+              <a:t>{</a:t>
+            </a:r>
+            <a:r>
+              <a:rPr lang="en-US" err="1" sz="2800" b="1">
+                <a:solidFill>
+                  <a:srgbClr val="2B2F47"/>
+                </a:solidFill>
+                <a:latin typeface="Arial"/>
+              </a:rPr>
+              <a:t>Ме</a:t>
+            </a:r>
+            <a:r>
+              <a:rPr lang="ru-RU" sz="2800" b="1">
+                <a:solidFill>
+                  <a:srgbClr val="2B2F47"/>
+                </a:solidFill>
+                <a:latin typeface="Arial"/>
+              </a:rPr>
+              <a:t>сяц</a:t>
+            </a:r>
+            <a:r>
+              <a:rPr lang="en-US" sz="2800" b="1">
+                <a:solidFill>
+                  <a:srgbClr val="2B2F47"/>
+                </a:solidFill>
+                <a:latin typeface="Arial"/>
+              </a:rPr>
+              <a:t>}}</a:t>
+            </a:r>
+            <a:r>
+              <a:rPr lang="ru-RU" sz="2800" b="1">
+                <a:solidFill>
+                  <a:srgbClr val="2B2F47"/>
+                </a:solidFill>
+                <a:latin typeface="Arial"/>
+              </a:rPr>
+              <a:t> </a:t>
+            </a:r>
+            <a:r>
+              <a:rPr lang="en-US" sz="2800" b="1">
+                <a:solidFill>
+                  <a:srgbClr val="2B2F47"/>
+                </a:solidFill>
+                <a:latin typeface="Arial"/>
+              </a:rPr>
+              <a:t>{{</a:t>
+            </a:r>
+            <a:r>
+              <a:rPr lang="ru-RU" sz="2800" b="1">
+                <a:solidFill>
+                  <a:srgbClr val="2B2F47"/>
+                </a:solidFill>
+                <a:latin typeface="Arial"/>
+              </a:rPr>
+              <a:t>Год</a:t>
+            </a:r>
+            <a:r>
+              <a:rPr lang="en-US" sz="2800" b="1">
+                <a:solidFill>
+                  <a:srgbClr val="2B2F47"/>
+                </a:solidFill>
+                <a:latin typeface="Arial"/>
+              </a:rPr>
+              <a:t>}}</a:t>
+            </a:r>
+          </a:p>
+        </p:txBody>
+      </p:sp>
+      <p:sp>
+        <p:nvSpPr>
+          <p:cNvPr id="3" name="Заголовок 2"/>
+          <p:cNvSpPr txBox="1"/>
+          <p:nvPr>
+            <p:custDataLst>
+              <p:tags r:id="rId4"/>
+            </p:custDataLst>
+          </p:nvPr>
+        </p:nvSpPr>
+        <p:spPr>
+          <a:xfrm>
+            <a:off x="548640" y="1280160"/>
+            <a:ext cx="3291840" cy="1005840"/>
+          </a:xfrm>
+          <a:prstGeom prst="rect">
+            <a:avLst/>
+          </a:prstGeom>
+          <a:noFill/>
+        </p:spPr>
+        <p:txBody>
+          <a:bodyPr wrap="square">
+            <a:noAutofit/>
+          </a:bodyPr>
+          <a:lstStyle/>
+          <a:p>
+            <a:pPr algn="l"/>
+            <a:r>
+              <a:rPr lang="en-US" sz="2400" b="1">
+                <a:solidFill>
+                  <a:srgbClr val="2B2F47"/>
+                </a:solidFill>
+                <a:latin typeface="Arial"/>
+              </a:rPr>
+              <a:t>{{</a:t>
+            </a:r>
+            <a:r>
+              <a:rPr lang="ru-RU" sz="2400" b="1">
+                <a:solidFill>
+                  <a:srgbClr val="2B2F47"/>
+                </a:solidFill>
+                <a:latin typeface="Arial"/>
+              </a:rPr>
+              <a:t>Выручка</a:t>
+            </a:r>
+            <a:r>
+              <a:rPr lang="en-US" sz="2400" b="1">
+                <a:solidFill>
+                  <a:srgbClr val="2B2F47"/>
+                </a:solidFill>
+                <a:latin typeface="Arial"/>
+              </a:rPr>
+              <a:t>}}</a:t>
+            </a:r>
+            <a:r>
+              <a:rPr lang="ru-RU" sz="2400" b="1">
+                <a:solidFill>
+                  <a:srgbClr val="2B2F47"/>
+                </a:solidFill>
+                <a:latin typeface="Arial"/>
+              </a:rPr>
+              <a:t> млн ₽</a:t>
+            </a:r>
+          </a:p>
+          <a:p>
+            <a:pPr algn="l"/>
+            <a:r>
+              <a:rPr lang="ru-RU" sz="2400" b="1">
+                <a:solidFill>
+                  <a:srgbClr val="2B2F47"/>
+                </a:solidFill>
+                <a:latin typeface="Arial"/>
+              </a:rPr>
+              <a:t>выручка без НДС</a:t>
+            </a:r>
+          </a:p>
+        </p:txBody>
+      </p:sp>
+      <p:sp>
+        <p:nvSpPr>
+          <p:cNvPr id="4" name="Заголовок 2"/>
+          <p:cNvSpPr txBox="1"/>
+          <p:nvPr/>
+        </p:nvSpPr>
+        <p:spPr>
+          <a:xfrm>
+            <a:off x="4206240" y="1280160"/>
+            <a:ext cx="3291840" cy="1005840"/>
+          </a:xfrm>
+          <a:prstGeom prst="rect">
+            <a:avLst/>
+          </a:prstGeom>
+          <a:noFill/>
+        </p:spPr>
+        <p:txBody>
+          <a:bodyPr wrap="square">
+            <a:noAutofit/>
+          </a:bodyPr>
+          <a:lstStyle/>
+          <a:p>
+            <a:pPr algn="l"/>
+            <a:r>
+              <a:rPr lang="en-US" sz="2400" b="1">
+                <a:solidFill>
+                  <a:srgbClr val="2B2F47"/>
+                </a:solidFill>
+                <a:latin typeface="Arial"/>
+              </a:rPr>
+              <a:t>{{</a:t>
+            </a:r>
+            <a:r>
+              <a:rPr lang="ru-RU" sz="2400" b="1">
+                <a:solidFill>
+                  <a:srgbClr val="2B2F47"/>
+                </a:solidFill>
+                <a:latin typeface="Arial"/>
+              </a:rPr>
+              <a:t>Прирост+</a:t>
+            </a:r>
+            <a:r>
+              <a:rPr lang="en-US" sz="2400" b="1">
+                <a:solidFill>
+                  <a:srgbClr val="2B2F47"/>
+                </a:solidFill>
+                <a:latin typeface="Arial"/>
+              </a:rPr>
+              <a:t>}}</a:t>
+            </a:r>
+            <a:r>
+              <a:rPr lang="ru-RU" sz="2400" b="1">
+                <a:solidFill>
+                  <a:srgbClr val="2B2F47"/>
+                </a:solidFill>
+                <a:latin typeface="Arial"/>
+              </a:rPr>
+              <a:t>%</a:t>
+            </a:r>
+          </a:p>
+          <a:p>
+            <a:pPr algn="l"/>
+            <a:r>
+              <a:rPr lang="ru-RU" sz="2400" b="1">
+                <a:solidFill>
+                  <a:srgbClr val="2B2F47"/>
+                </a:solidFill>
+                <a:latin typeface="Arial"/>
+              </a:rPr>
+              <a:t>к прошлому месяцу</a:t>
+            </a:r>
+          </a:p>
+        </p:txBody>
+      </p:sp>
+      <p:sp>
+        <p:nvSpPr>
+          <p:cNvPr id="5" name="План"/>
+          <p:cNvSpPr txBox="1"/>
+          <p:nvPr/>
+        </p:nvSpPr>
+        <p:spPr>
+          <a:xfrm>
+            <a:off x="7863840" y="1280160"/>
+            <a:ext cx="3657600" cy="1005840"/>
+          </a:xfrm>
+          <a:prstGeom prst="rect">
+            <a:avLst/>
+          </a:prstGeom>
+          <a:noFill/>
+        </p:spPr>
+        <p:txBody>
+          <a:bodyPr wrap="square">
+            <a:noAutofit/>
+          </a:bodyPr>
+          <a:lstStyle/>
+          <a:p>
+            <a:pPr algn="l"/>
+            <a:r>
+              <a:rPr lang="en-US" sz="2400" b="1">
+                <a:solidFill>
+                  <a:srgbClr val="2B2F47"/>
+                </a:solidFill>
+                <a:latin typeface="Arial"/>
+              </a:rPr>
+              <a:t>{{</a:t>
+            </a:r>
+            <a:r>
+              <a:rPr lang="ru-RU" sz="2400" b="1">
+                <a:solidFill>
+                  <a:srgbClr val="2B2F47"/>
+                </a:solidFill>
+                <a:latin typeface="Arial"/>
+              </a:rPr>
+              <a:t>Доля</a:t>
+            </a:r>
+            <a:r>
+              <a:rPr lang="en-US" sz="2400" b="1">
+                <a:solidFill>
+                  <a:srgbClr val="2B2F47"/>
+                </a:solidFill>
+                <a:latin typeface="Arial"/>
+              </a:rPr>
+              <a:t>}}</a:t>
+            </a:r>
+            <a:r>
+              <a:rPr lang="ru-RU" sz="2400" b="1">
+                <a:solidFill>
+                  <a:srgbClr val="2B2F47"/>
+                </a:solidFill>
+                <a:latin typeface="Arial"/>
+              </a:rPr>
+              <a:t>% плана выполнено</a:t>
+            </a:r>
+          </a:p>
+        </p:txBody>
+      </p:sp>
+      <p:graphicFrame>
+        <p:nvGraphicFramePr>
+          <p:cNvPr id="6" name="Диаграмма 3"/>
+          <p:cNvGraphicFramePr>
+            <a:graphicFrameLocks noGrp="1"/>
+          </p:cNvGraphicFramePr>
+          <p:nvPr/>
+        </p:nvGraphicFramePr>
+        <p:xfrm>
+          <a:off x="548640" y="2468880"/>
+          <a:ext cx="11064240" cy="3840480"/>
+        </p:xfrm>
+        <a:graphic>
+          <a:graphicData uri="http://schemas.openxmlformats.org/drawingml/2006/chart">
+            <c:chart xmlns:c="http://schemas.openxmlformats.org/drawingml/2006/chart" r:id="rId2"/>
+          </a:graphicData>
+        </a:graphic>
+      </p:graphicFrame>
+    </p:spTree>
+  </p:cSld>
+  <p:clrMapOvr>
+    <a:masterClrMapping/>
+  </p:clrMapOvr>
+</p:sld>
+</file>
+
+<file path=ppt/slides/slide3.xml><?xml version="1.0" encoding="utf-8"?>
+<p:sld xmlns:a="http://schemas.openxmlformats.org/drawingml/2006/main" xmlns:p="http://schemas.openxmlformats.org/presentationml/2006/main" xmlns:r="http://schemas.openxmlformats.org/officeDocument/2006/relationships">
+  <p:cSld>
+    <p:spTree>
+      <p:nvGrpSpPr>
+        <p:cNvPr id="1" name=""/>
+        <p:cNvGrpSpPr/>
+        <p:nvPr/>
+      </p:nvGrpSpPr>
+      <p:grpSpPr/>
+      <p:sp>
+        <p:nvSpPr>
+          <p:cNvPr id="2" name="Заголовок 1"/>
+          <p:cNvSpPr txBox="1"/>
+          <p:nvPr/>
+        </p:nvSpPr>
+        <p:spPr>
+          <a:xfrm>
+            <a:off x="457200" y="320040"/>
+            <a:ext cx="11247120" cy="731520"/>
+          </a:xfrm>
+          <a:prstGeom prst="rect">
+            <a:avLst/>
+          </a:prstGeom>
+          <a:noFill/>
+        </p:spPr>
+        <p:txBody>
+          <a:bodyPr wrap="square">
+            <a:noAutofit/>
+          </a:bodyPr>
+          <a:lstStyle/>
+          <a:p>
+            <a:pPr algn="ctr"/>
+            <a:r>
+              <a:rPr lang="ru-RU" sz="2800" b="1">
+                <a:solidFill>
+                  <a:srgbClr val="2B2F47"/>
+                </a:solidFill>
+                <a:latin typeface="Arial"/>
+              </a:rPr>
+              <a:t>Регионы</a:t>
+            </a:r>
+            <a:r>
+              <a:rPr lang="en-US" sz="2800" b="1">
+                <a:solidFill>
+                  <a:srgbClr val="2B2F47"/>
+                </a:solidFill>
+                <a:latin typeface="Arial"/>
+              </a:rPr>
+              <a:t>, </a:t>
+            </a:r>
+            <a:r>
+              <a:rPr lang="en-US" sz="2800" b="1">
+                <a:solidFill>
+                  <a:srgbClr val="2B2F47"/>
+                </a:solidFill>
+                <a:latin typeface="Arial"/>
+              </a:rPr>
+              <a:t>{{</a:t>
+            </a:r>
+            <a:r>
+              <a:rPr lang="ru-RU" sz="2800" b="1">
+                <a:solidFill>
+                  <a:srgbClr val="2B2F47"/>
+                </a:solidFill>
+                <a:latin typeface="Arial"/>
+              </a:rPr>
+              <a:t>Месяц</a:t>
+            </a:r>
+            <a:r>
+              <a:rPr lang="en-US" sz="2800" b="1">
+                <a:solidFill>
+                  <a:srgbClr val="2B2F47"/>
+                </a:solidFill>
+                <a:latin typeface="Arial"/>
+              </a:rPr>
+              <a:t>}}</a:t>
+            </a:r>
+            <a:r>
+              <a:rPr lang="ru-RU" sz="2800" b="1">
+                <a:solidFill>
+                  <a:srgbClr val="2B2F47"/>
+                </a:solidFill>
+                <a:latin typeface="Arial"/>
+              </a:rPr>
+              <a:t> </a:t>
+            </a:r>
+            <a:r>
+              <a:rPr lang="en-US" sz="2800" b="1">
+                <a:solidFill>
+                  <a:srgbClr val="2B2F47"/>
+                </a:solidFill>
+                <a:latin typeface="Arial"/>
+              </a:rPr>
+              <a:t>{{</a:t>
+            </a:r>
+            <a:r>
+              <a:rPr lang="ru-RU" sz="2800" b="1">
+                <a:solidFill>
+                  <a:srgbClr val="2B2F47"/>
+                </a:solidFill>
+                <a:latin typeface="Arial"/>
+              </a:rPr>
+              <a:t>Год</a:t>
+            </a:r>
+            <a:r>
+              <a:rPr lang="en-US" sz="2800" b="1">
+                <a:solidFill>
+                  <a:srgbClr val="2B2F47"/>
+                </a:solidFill>
+                <a:latin typeface="Arial"/>
+              </a:rPr>
+              <a:t>}}</a:t>
+            </a:r>
+          </a:p>
+        </p:txBody>
+      </p:sp>
+      <p:sp>
+        <p:nvSpPr>
+          <p:cNvPr id="3" name="Доля"/>
+          <p:cNvSpPr txBox="1"/>
+          <p:nvPr/>
+        </p:nvSpPr>
+        <p:spPr>
+          <a:xfrm>
+            <a:off x="548640" y="1463040"/>
+            <a:ext cx="3657600" cy="1280160"/>
+          </a:xfrm>
+          <a:prstGeom prst="rect">
+            <a:avLst/>
+          </a:prstGeom>
+          <a:noFill/>
+        </p:spPr>
+        <p:txBody>
+          <a:bodyPr wrap="square">
+            <a:noAutofit/>
+          </a:bodyPr>
+          <a:lstStyle/>
+          <a:p>
+            <a:pPr algn="l"/>
+            <a:r>
+              <a:rPr lang="en-US" sz="2400" b="1">
+                <a:solidFill>
+                  <a:srgbClr val="2B2F47"/>
+                </a:solidFill>
+                <a:latin typeface="Arial"/>
+              </a:rPr>
+              <a:t>{{</a:t>
+            </a:r>
+            <a:r>
+              <a:rPr lang="ru-RU" sz="2400" b="1">
+                <a:solidFill>
+                  <a:srgbClr val="2B2F47"/>
+                </a:solidFill>
+                <a:latin typeface="Arial"/>
+              </a:rPr>
+              <a:t>Доля</a:t>
+            </a:r>
+            <a:r>
+              <a:rPr lang="en-US" sz="2400" b="1">
+                <a:solidFill>
+                  <a:srgbClr val="2B2F47"/>
+                </a:solidFill>
+                <a:latin typeface="Arial"/>
+              </a:rPr>
+              <a:t>}}</a:t>
+            </a:r>
+            <a:r>
+              <a:rPr lang="ru-RU" sz="2400" b="1">
+                <a:solidFill>
+                  <a:srgbClr val="2B2F47"/>
+                </a:solidFill>
+                <a:latin typeface="Arial"/>
+              </a:rPr>
+              <a:t>%</a:t>
+            </a:r>
+          </a:p>
+          <a:p>
+            <a:pPr algn="l"/>
+            <a:r>
+              <a:rPr lang="ru-RU" sz="2400" b="1">
+                <a:solidFill>
+                  <a:srgbClr val="2B2F47"/>
+                </a:solidFill>
+                <a:latin typeface="Arial"/>
+              </a:rPr>
+              <a:t>выручки — у первого региона</a:t>
+            </a:r>
+          </a:p>
+        </p:txBody>
+      </p:sp>
+      <p:graphicFrame>
+        <p:nvGraphicFramePr>
+          <p:cNvPr id="4" name="Диаграмма 5"/>
+          <p:cNvGraphicFramePr>
+            <a:graphicFrameLocks noGrp="1"/>
+          </p:cNvGraphicFramePr>
+          <p:nvPr/>
+        </p:nvGraphicFramePr>
+        <p:xfrm>
+          <a:off x="4572000" y="1188720"/>
+          <a:ext cx="6949440" cy="5120640"/>
+        </p:xfrm>
+        <a:graphic>
+          <a:graphicData uri="http://schemas.openxmlformats.org/drawingml/2006/chart">
+            <c:chart xmlns:c="http://schemas.openxmlformats.org/drawingml/2006/chart" r:id="rId2"/>
+          </a:graphicData>
+        </a:graphic>
+      </p:graphicFrame>
+    </p:spTree>
+  </p:cSld>
+  <p:clrMapOvr>
+    <a:masterClrMapping/>
+  </p:clrMapOvr>
+</p:sld>
+</file>
+
+<file path=ppt/slides/slide4.xml><?xml version="1.0" encoding="utf-8"?>
+<p:sld xmlns:a="http://schemas.openxmlformats.org/drawingml/2006/main" xmlns:p="http://schemas.openxmlformats.org/presentationml/2006/main" xmlns:r="http://schemas.openxmlformats.org/officeDocument/2006/relationships">
+  <p:cSld>
+    <p:spTree>
+      <p:nvGrpSpPr>
+        <p:cNvPr id="1" name=""/>
+        <p:cNvGrpSpPr/>
+        <p:nvPr/>
+      </p:nvGrpSpPr>
+      <p:grpSpPr/>
+      <p:sp>
+        <p:nvSpPr>
+          <p:cNvPr id="2" name="Заголовок 1"/>
+          <p:cNvSpPr txBox="1"/>
+          <p:nvPr/>
+        </p:nvSpPr>
+        <p:spPr>
+          <a:xfrm>
+            <a:off x="457200" y="320040"/>
+            <a:ext cx="11247120" cy="731520"/>
+          </a:xfrm>
+          <a:prstGeom prst="rect">
+            <a:avLst/>
+          </a:prstGeom>
+          <a:noFill/>
+        </p:spPr>
+        <p:txBody>
+          <a:bodyPr wrap="square">
+            <a:noAutofit/>
+          </a:bodyPr>
+          <a:lstStyle/>
+          <a:p>
+            <a:pPr algn="ctr"/>
+            <a:r>
+              <a:rPr lang="ru-RU" sz="2800" b="1">
+                <a:solidFill>
+                  <a:srgbClr val="2B2F47"/>
+                </a:solidFill>
+                <a:latin typeface="Arial"/>
+              </a:rPr>
+              <a:t>План по регионам</a:t>
+            </a:r>
+            <a:r>
+              <a:rPr lang="en-US" sz="2800" b="1">
+                <a:solidFill>
+                  <a:srgbClr val="2B2F47"/>
+                </a:solidFill>
+                <a:latin typeface="Arial"/>
+              </a:rPr>
+              <a:t>, </a:t>
+            </a:r>
+            <a:r>
+              <a:rPr lang="en-US" sz="2800" b="1">
+                <a:solidFill>
+                  <a:srgbClr val="2B2F47"/>
+                </a:solidFill>
+                <a:latin typeface="Arial"/>
+              </a:rPr>
+              <a:t>{{</a:t>
+            </a:r>
+            <a:r>
+              <a:rPr lang="ru-RU" sz="2800" b="1">
+                <a:solidFill>
+                  <a:srgbClr val="2B2F47"/>
+                </a:solidFill>
+                <a:latin typeface="Arial"/>
+              </a:rPr>
+              <a:t>Месяц</a:t>
+            </a:r>
+            <a:r>
+              <a:rPr lang="en-US" sz="2800" b="1">
+                <a:solidFill>
+                  <a:srgbClr val="2B2F47"/>
+                </a:solidFill>
+                <a:latin typeface="Arial"/>
+              </a:rPr>
+              <a:t>}}</a:t>
+            </a:r>
+            <a:r>
+              <a:rPr lang="ru-RU" sz="2800" b="1">
+                <a:solidFill>
+                  <a:srgbClr val="2B2F47"/>
+                </a:solidFill>
+                <a:latin typeface="Arial"/>
+              </a:rPr>
+              <a:t> </a:t>
+            </a:r>
+            <a:r>
+              <a:rPr lang="en-US" sz="2800" b="1">
+                <a:solidFill>
+                  <a:srgbClr val="2B2F47"/>
+                </a:solidFill>
+                <a:latin typeface="Arial"/>
+              </a:rPr>
+              <a:t>{{</a:t>
+            </a:r>
+            <a:r>
+              <a:rPr lang="ru-RU" sz="2800" b="1">
+                <a:solidFill>
+                  <a:srgbClr val="2B2F47"/>
+                </a:solidFill>
+                <a:latin typeface="Arial"/>
+              </a:rPr>
+              <a:t>Год</a:t>
+            </a:r>
+            <a:r>
+              <a:rPr lang="en-US" sz="2800" b="1">
+                <a:solidFill>
+                  <a:srgbClr val="2B2F47"/>
+                </a:solidFill>
+                <a:latin typeface="Arial"/>
+              </a:rPr>
+              <a:t>}}</a:t>
+            </a:r>
+          </a:p>
+        </p:txBody>
+      </p:sp>
+      <p:graphicFrame>
+        <p:nvGraphicFramePr>
+          <p:cNvPr id="3" name="Диаграмма 7"/>
+          <p:cNvGraphicFramePr>
+            <a:graphicFrameLocks noGrp="1"/>
+          </p:cNvGraphicFramePr>
+          <p:nvPr/>
+        </p:nvGraphicFramePr>
+        <p:xfrm>
+          <a:off x="548640" y="1188720"/>
+          <a:ext cx="8778240" cy="5303520"/>
+        </p:xfrm>
+        <a:graphic>
+          <a:graphicData uri="http://schemas.openxmlformats.org/drawingml/2006/chart">
+            <c:chart xmlns:c="http://schemas.openxmlformats.org/drawingml/2006/chart" r:id="rId2"/>
+          </a:graphicData>
+        </a:graphic>
+      </p:graphicFrame>
+      <p:sp>
+        <p:nvSpPr>
+          <p:cNvPr id="4" name="Надпись 1"/>
+          <p:cNvSpPr txBox="1"/>
+          <p:nvPr/>
+        </p:nvSpPr>
+        <p:spPr>
+          <a:xfrm>
+            <a:off x="9509760" y="1508760"/>
+            <a:ext cx="2194560" cy="457200"/>
+          </a:xfrm>
+          <a:prstGeom prst="rect">
+            <a:avLst/>
+          </a:prstGeom>
+          <a:noFill/>
+        </p:spPr>
+        <p:txBody>
+          <a:bodyPr wrap="square">
+            <a:noAutofit/>
+          </a:bodyPr>
+          <a:lstStyle/>
+          <a:p>
+            <a:pPr algn="l"/>
+            <a:r>
+              <a:rPr lang="en-US" sz="1600" b="0">
+                <a:solidFill>
+                  <a:srgbClr val="2B2F47"/>
+                </a:solidFill>
+                <a:latin typeface="Arial"/>
+              </a:rPr>
+              <a:t>{{</a:t>
+            </a:r>
+            <a:r>
+              <a:rPr lang="ru-RU" sz="1600" b="0">
+                <a:solidFill>
+                  <a:srgbClr val="2B2F47"/>
+                </a:solidFill>
+                <a:latin typeface="Arial"/>
+              </a:rPr>
+              <a:t>р1=</a:t>
+            </a:r>
+            <a:r>
+              <a:rPr lang="en-US" sz="1600" b="0">
+                <a:solidFill>
+                  <a:srgbClr val="2B2F47"/>
+                </a:solidFill>
+                <a:latin typeface="Arial"/>
+              </a:rPr>
+              <a:t>}}</a:t>
+            </a:r>
+            <a:r>
+              <a:rPr lang="ru-RU" sz="1600" b="0">
+                <a:solidFill>
+                  <a:srgbClr val="2B2F47"/>
+                </a:solidFill>
+                <a:latin typeface="Arial"/>
+              </a:rPr>
+              <a:t> п.п.</a:t>
+            </a:r>
+          </a:p>
+        </p:txBody>
+      </p:sp>
+      <p:sp>
+        <p:nvSpPr>
+          <p:cNvPr id="5" name="Надпись 2"/>
+          <p:cNvSpPr txBox="1"/>
+          <p:nvPr/>
+        </p:nvSpPr>
+        <p:spPr>
+          <a:xfrm>
+            <a:off x="9509760" y="2359152"/>
+            <a:ext cx="2194560" cy="457200"/>
+          </a:xfrm>
+          <a:prstGeom prst="rect">
+            <a:avLst/>
+          </a:prstGeom>
+          <a:noFill/>
+        </p:spPr>
+        <p:txBody>
+          <a:bodyPr wrap="square">
+            <a:noAutofit/>
+          </a:bodyPr>
+          <a:lstStyle/>
+          <a:p>
+            <a:pPr algn="l"/>
+            <a:r>
+              <a:rPr lang="en-US" sz="1600" b="0">
+                <a:solidFill>
+                  <a:srgbClr val="2B2F47"/>
+                </a:solidFill>
+                <a:latin typeface="Arial"/>
+              </a:rPr>
+              <a:t>{{</a:t>
+            </a:r>
+            <a:r>
+              <a:rPr lang="ru-RU" sz="1600" b="0">
+                <a:solidFill>
+                  <a:srgbClr val="2B2F47"/>
+                </a:solidFill>
+                <a:latin typeface="Arial"/>
+              </a:rPr>
+              <a:t>р2=</a:t>
+            </a:r>
+            <a:r>
+              <a:rPr lang="en-US" sz="1600" b="0">
+                <a:solidFill>
+                  <a:srgbClr val="2B2F47"/>
+                </a:solidFill>
+                <a:latin typeface="Arial"/>
+              </a:rPr>
+              <a:t>}}</a:t>
+            </a:r>
+            <a:r>
+              <a:rPr lang="ru-RU" sz="1600" b="0">
+                <a:solidFill>
+                  <a:srgbClr val="2B2F47"/>
+                </a:solidFill>
+                <a:latin typeface="Arial"/>
+              </a:rPr>
+              <a:t> п.п.</a:t>
+            </a:r>
+          </a:p>
+        </p:txBody>
+      </p:sp>
+      <p:sp>
+        <p:nvSpPr>
+          <p:cNvPr id="6" name="Надпись 3"/>
+          <p:cNvSpPr txBox="1"/>
+          <p:nvPr/>
+        </p:nvSpPr>
+        <p:spPr>
+          <a:xfrm>
+            <a:off x="9509760" y="3209544"/>
+            <a:ext cx="2194560" cy="457200"/>
+          </a:xfrm>
+          <a:prstGeom prst="rect">
+            <a:avLst/>
+          </a:prstGeom>
+          <a:noFill/>
+        </p:spPr>
+        <p:txBody>
+          <a:bodyPr wrap="square">
+            <a:noAutofit/>
+          </a:bodyPr>
+          <a:lstStyle/>
+          <a:p>
+            <a:pPr algn="l"/>
+            <a:r>
+              <a:rPr lang="en-US" sz="1600" b="0">
+                <a:solidFill>
+                  <a:srgbClr val="2B2F47"/>
+                </a:solidFill>
+                <a:latin typeface="Arial"/>
+              </a:rPr>
+              <a:t>{{</a:t>
+            </a:r>
+            <a:r>
+              <a:rPr lang="ru-RU" sz="1600" b="0">
+                <a:solidFill>
+                  <a:srgbClr val="2B2F47"/>
+                </a:solidFill>
+                <a:latin typeface="Arial"/>
+              </a:rPr>
+              <a:t>р3=</a:t>
+            </a:r>
+            <a:r>
+              <a:rPr lang="en-US" sz="1600" b="0">
+                <a:solidFill>
+                  <a:srgbClr val="2B2F47"/>
+                </a:solidFill>
+                <a:latin typeface="Arial"/>
+              </a:rPr>
+              <a:t>}}</a:t>
+            </a:r>
+            <a:r>
+              <a:rPr lang="ru-RU" sz="1600" b="0">
+                <a:solidFill>
+                  <a:srgbClr val="2B2F47"/>
+                </a:solidFill>
+                <a:latin typeface="Arial"/>
+              </a:rPr>
+              <a:t> п.п.</a:t>
+            </a:r>
+          </a:p>
+        </p:txBody>
+      </p:sp>
+      <p:sp>
+        <p:nvSpPr>
+          <p:cNvPr id="7" name="Надпись 4"/>
+          <p:cNvSpPr txBox="1"/>
+          <p:nvPr/>
+        </p:nvSpPr>
+        <p:spPr>
+          <a:xfrm>
+            <a:off x="9509760" y="4059935"/>
+            <a:ext cx="2194560" cy="457200"/>
+          </a:xfrm>
+          <a:prstGeom prst="rect">
+            <a:avLst/>
+          </a:prstGeom>
+          <a:noFill/>
+        </p:spPr>
+        <p:txBody>
+          <a:bodyPr wrap="square">
+            <a:noAutofit/>
+          </a:bodyPr>
+          <a:lstStyle/>
+          <a:p>
+            <a:pPr algn="l"/>
+            <a:r>
+              <a:rPr lang="en-US" sz="1600" b="0">
+                <a:solidFill>
+                  <a:srgbClr val="2B2F47"/>
+                </a:solidFill>
+                <a:latin typeface="Arial"/>
+              </a:rPr>
+              <a:t>{{</a:t>
+            </a:r>
+            <a:r>
+              <a:rPr lang="ru-RU" sz="1600" b="0">
+                <a:solidFill>
+                  <a:srgbClr val="2B2F47"/>
+                </a:solidFill>
+                <a:latin typeface="Arial"/>
+              </a:rPr>
+              <a:t>р4=</a:t>
+            </a:r>
+            <a:r>
+              <a:rPr lang="en-US" sz="1600" b="0">
+                <a:solidFill>
+                  <a:srgbClr val="2B2F47"/>
+                </a:solidFill>
+                <a:latin typeface="Arial"/>
+              </a:rPr>
+              <a:t>}}</a:t>
+            </a:r>
+            <a:r>
+              <a:rPr lang="ru-RU" sz="1600" b="0">
+                <a:solidFill>
+                  <a:srgbClr val="2B2F47"/>
+                </a:solidFill>
+                <a:latin typeface="Arial"/>
+              </a:rPr>
+              <a:t> п.п.</a:t>
+            </a:r>
+          </a:p>
+        </p:txBody>
+      </p:sp>
+      <p:sp>
+        <p:nvSpPr>
+          <p:cNvPr id="8" name="Надпись 5"/>
+          <p:cNvSpPr txBox="1"/>
+          <p:nvPr/>
+        </p:nvSpPr>
+        <p:spPr>
+          <a:xfrm>
+            <a:off x="9509760" y="4910328"/>
+            <a:ext cx="2194560" cy="457200"/>
+          </a:xfrm>
+          <a:prstGeom prst="rect">
+            <a:avLst/>
+          </a:prstGeom>
+          <a:noFill/>
+        </p:spPr>
+        <p:txBody>
+          <a:bodyPr wrap="square">
+            <a:noAutofit/>
+          </a:bodyPr>
+          <a:lstStyle/>
+          <a:p>
+            <a:pPr algn="l"/>
+            <a:r>
+              <a:rPr lang="en-US" sz="1600" b="0">
+                <a:solidFill>
+                  <a:srgbClr val="2B2F47"/>
+                </a:solidFill>
+                <a:latin typeface="Arial"/>
+              </a:rPr>
+              <a:t>{{</a:t>
+            </a:r>
+            <a:r>
+              <a:rPr lang="ru-RU" sz="1600" b="0">
+                <a:solidFill>
+                  <a:srgbClr val="2B2F47"/>
+                </a:solidFill>
+                <a:latin typeface="Arial"/>
+              </a:rPr>
+              <a:t>р5=</a:t>
+            </a:r>
+            <a:r>
+              <a:rPr lang="en-US" sz="1600" b="0">
+                <a:solidFill>
+                  <a:srgbClr val="2B2F47"/>
+                </a:solidFill>
+                <a:latin typeface="Arial"/>
+              </a:rPr>
+              <a:t>}}</a:t>
+            </a:r>
+            <a:r>
+              <a:rPr lang="ru-RU" sz="1600" b="0">
+                <a:solidFill>
+                  <a:srgbClr val="2B2F47"/>
+                </a:solidFill>
+                <a:latin typeface="Arial"/>
+              </a:rPr>
+              <a:t> п.п.</a:t>
+            </a:r>
+          </a:p>
+        </p:txBody>
+      </p:sp>
+    </p:spTree>
+  </p:cSld>
+  <p:clrMapOvr>
+    <a:masterClrMapping/>
+  </p:clrMapOvr>
+</p:sld>
+</file>
+
+<file path=ppt/slides/slide5.xml><?xml version="1.0" encoding="utf-8"?>
+<p:sld xmlns:a="http://schemas.openxmlformats.org/drawingml/2006/main" xmlns:p="http://schemas.openxmlformats.org/presentationml/2006/main" xmlns:r="http://schemas.openxmlformats.org/officeDocument/2006/relationships">
+  <p:cSld>
+    <p:spTree>
+      <p:nvGrpSpPr>
+        <p:cNvPr id="1" name=""/>
+        <p:cNvGrpSpPr/>
+        <p:nvPr/>
+      </p:nvGrpSpPr>
+      <p:grpSpPr/>
+      <p:sp>
+        <p:nvSpPr>
+          <p:cNvPr id="2" name="Заголовок 1"/>
+          <p:cNvSpPr txBox="1"/>
+          <p:nvPr/>
+        </p:nvSpPr>
+        <p:spPr>
+          <a:xfrm>
+            <a:off x="457200" y="320040"/>
+            <a:ext cx="11247120" cy="731520"/>
+          </a:xfrm>
+          <a:prstGeom prst="rect">
+            <a:avLst/>
+          </a:prstGeom>
+          <a:noFill/>
+        </p:spPr>
+        <p:txBody>
+          <a:bodyPr wrap="square">
+            <a:noAutofit/>
+          </a:bodyPr>
+          <a:lstStyle/>
+          <a:p>
+            <a:pPr algn="ctr"/>
+            <a:r>
+              <a:rPr lang="ru-RU" sz="2800" b="1">
+                <a:solidFill>
+                  <a:srgbClr val="2B2F47"/>
+                </a:solidFill>
+                <a:latin typeface="Arial"/>
+              </a:rPr>
+              <a:t>Заказы</a:t>
+            </a:r>
+            <a:r>
+              <a:rPr lang="en-US" sz="2800" b="1">
+                <a:solidFill>
+                  <a:srgbClr val="2B2F47"/>
+                </a:solidFill>
+                <a:latin typeface="Arial"/>
+              </a:rPr>
+              <a:t>, </a:t>
+            </a:r>
+            <a:r>
+              <a:rPr lang="en-US" sz="2800" b="1">
+                <a:solidFill>
+                  <a:srgbClr val="2B2F47"/>
+                </a:solidFill>
+                <a:latin typeface="Arial"/>
+              </a:rPr>
+              <a:t>{{</a:t>
+            </a:r>
+            <a:r>
+              <a:rPr lang="ru-RU" sz="2800" b="1">
+                <a:solidFill>
+                  <a:srgbClr val="2B2F47"/>
+                </a:solidFill>
+                <a:latin typeface="Arial"/>
+              </a:rPr>
+              <a:t>Месяц</a:t>
+            </a:r>
+            <a:r>
+              <a:rPr lang="en-US" sz="2800" b="1">
+                <a:solidFill>
+                  <a:srgbClr val="2B2F47"/>
+                </a:solidFill>
+                <a:latin typeface="Arial"/>
+              </a:rPr>
+              <a:t>}}</a:t>
+            </a:r>
+            <a:r>
+              <a:rPr lang="ru-RU" sz="2800" b="1">
+                <a:solidFill>
+                  <a:srgbClr val="2B2F47"/>
+                </a:solidFill>
+                <a:latin typeface="Arial"/>
+              </a:rPr>
+              <a:t> </a:t>
+            </a:r>
+            <a:r>
+              <a:rPr lang="en-US" sz="2800" b="1">
+                <a:solidFill>
+                  <a:srgbClr val="2B2F47"/>
+                </a:solidFill>
+                <a:latin typeface="Arial"/>
+              </a:rPr>
+              <a:t>{{</a:t>
+            </a:r>
+            <a:r>
+              <a:rPr lang="ru-RU" sz="2800" b="1">
+                <a:solidFill>
+                  <a:srgbClr val="2B2F47"/>
+                </a:solidFill>
+                <a:latin typeface="Arial"/>
+              </a:rPr>
+              <a:t>Год</a:t>
+            </a:r>
+            <a:r>
+              <a:rPr lang="en-US" sz="2800" b="1">
+                <a:solidFill>
+                  <a:srgbClr val="2B2F47"/>
+                </a:solidFill>
+                <a:latin typeface="Arial"/>
+              </a:rPr>
+              <a:t>}}</a:t>
+            </a:r>
+          </a:p>
+        </p:txBody>
+      </p:sp>
+      <p:sp>
+        <p:nvSpPr>
+          <p:cNvPr id="3" name="Заказы"/>
+          <p:cNvSpPr txBox="1"/>
+          <p:nvPr/>
+        </p:nvSpPr>
+        <p:spPr>
+          <a:xfrm>
+            <a:off x="548640" y="1188720"/>
+            <a:ext cx="4572000" cy="548640"/>
+          </a:xfrm>
+          <a:prstGeom prst="rect">
+            <a:avLst/>
+          </a:prstGeom>
+          <a:noFill/>
+        </p:spPr>
+        <p:txBody>
+          <a:bodyPr wrap="square">
+            <a:noAutofit/>
+          </a:bodyPr>
+          <a:lstStyle/>
+          <a:p>
+            <a:pPr algn="l"/>
+            <a:r>
+              <a:rPr lang="en-US" sz="2000" b="1">
+                <a:solidFill>
+                  <a:srgbClr val="2B2F47"/>
+                </a:solidFill>
+                <a:latin typeface="Arial"/>
+              </a:rPr>
+              <a:t>{{</a:t>
+            </a:r>
+            <a:r>
+              <a:rPr lang="ru-RU" sz="2000" b="1">
+                <a:solidFill>
+                  <a:srgbClr val="2B2F47"/>
+                </a:solidFill>
+                <a:latin typeface="Arial"/>
+              </a:rPr>
+              <a:t>+заказы</a:t>
+            </a:r>
+            <a:r>
+              <a:rPr lang="en-US" sz="2000" b="1">
+                <a:solidFill>
+                  <a:srgbClr val="2B2F47"/>
+                </a:solidFill>
+                <a:latin typeface="Arial"/>
+              </a:rPr>
+              <a:t>}}</a:t>
+            </a:r>
+            <a:r>
+              <a:rPr lang="ru-RU" sz="2000" b="1">
+                <a:solidFill>
+                  <a:srgbClr val="2B2F47"/>
+                </a:solidFill>
+                <a:latin typeface="Arial"/>
+              </a:rPr>
+              <a:t> заказов</a:t>
+            </a:r>
+          </a:p>
+        </p:txBody>
+      </p:sp>
+      <p:sp>
+        <p:nvSpPr>
+          <p:cNvPr id="4" name="Возвраты"/>
+          <p:cNvSpPr txBox="1"/>
+          <p:nvPr/>
+        </p:nvSpPr>
+        <p:spPr>
+          <a:xfrm>
+            <a:off x="6035040" y="1188720"/>
+            <a:ext cx="4572000" cy="548640"/>
+          </a:xfrm>
+          <a:prstGeom prst="rect">
+            <a:avLst/>
+          </a:prstGeom>
+          <a:noFill/>
+        </p:spPr>
+        <p:txBody>
+          <a:bodyPr wrap="square">
+            <a:noAutofit/>
+          </a:bodyPr>
+          <a:lstStyle/>
+          <a:p>
+            <a:pPr algn="l"/>
+            <a:r>
+              <a:rPr lang="en-US" sz="2000" b="1">
+                <a:solidFill>
+                  <a:srgbClr val="2B2F47"/>
+                </a:solidFill>
+                <a:latin typeface="Arial"/>
+              </a:rPr>
+              <a:t>{{</a:t>
+            </a:r>
+            <a:r>
+              <a:rPr lang="ru-RU" sz="2000" b="1">
+                <a:solidFill>
+                  <a:srgbClr val="2B2F47"/>
+                </a:solidFill>
+                <a:latin typeface="Arial"/>
+              </a:rPr>
+              <a:t>возвраты-</a:t>
+            </a:r>
+            <a:r>
+              <a:rPr lang="en-US" sz="2000" b="1">
+                <a:solidFill>
+                  <a:srgbClr val="2B2F47"/>
+                </a:solidFill>
+                <a:latin typeface="Arial"/>
+              </a:rPr>
+              <a:t>}}</a:t>
+            </a:r>
+            <a:r>
+              <a:rPr lang="ru-RU" sz="2000" b="1">
+                <a:solidFill>
+                  <a:srgbClr val="2B2F47"/>
+                </a:solidFill>
+                <a:latin typeface="Arial"/>
+              </a:rPr>
+              <a:t> возвратов</a:t>
+            </a:r>
+          </a:p>
+        </p:txBody>
+      </p:sp>
+      <p:graphicFrame>
+        <p:nvGraphicFramePr>
+          <p:cNvPr id="5" name="Диаграмма 9"/>
+          <p:cNvGraphicFramePr>
+            <a:graphicFrameLocks noGrp="1"/>
+          </p:cNvGraphicFramePr>
+          <p:nvPr/>
+        </p:nvGraphicFramePr>
+        <p:xfrm>
+          <a:off x="548640" y="1828800"/>
+          <a:ext cx="11064240" cy="4480560"/>
+        </p:xfrm>
+        <a:graphic>
+          <a:graphicData uri="http://schemas.openxmlformats.org/drawingml/2006/chart">
+            <c:chart xmlns:c="http://schemas.openxmlformats.org/drawingml/2006/chart" r:id="rId2"/>
+          </a:graphicData>
+        </a:graphic>
+      </p:graphicFrame>
+      <p:graphicFrame>
+        <p:nvGraphicFramePr>
+          <p:cNvPr id="6" name="Диаграмма 10"/>
+          <p:cNvGraphicFramePr>
+            <a:graphicFrameLocks noGrp="1"/>
+          </p:cNvGraphicFramePr>
+          <p:nvPr/>
+        </p:nvGraphicFramePr>
+        <p:xfrm>
+          <a:off x="548640" y="1828800"/>
+          <a:ext cx="11064240" cy="4480560"/>
+        </p:xfrm>
+        <a:graphic>
+          <a:graphicData uri="http://schemas.openxmlformats.org/drawingml/2006/chart">
+            <c:chart xmlns:c="http://schemas.openxmlformats.org/drawingml/2006/chart" r:id="rId3"/>
+          </a:graphicData>
+        </a:graphic>
+      </p:graphicFrame>
+    </p:spTree>
+  </p:cSld>
+  <p:clrMapOvr>
+    <a:masterClrMapping/>
+  </p:clrMapOvr>
+</p:sld>
+</file>
+
+<file path=ppt/slides/slide6.xml><?xml version="1.0" encoding="utf-8"?>
+<p:sld xmlns:a="http://schemas.openxmlformats.org/drawingml/2006/main" xmlns:p="http://schemas.openxmlformats.org/presentationml/2006/main" xmlns:r="http://schemas.openxmlformats.org/officeDocument/2006/relationships">
+  <p:cSld>
+    <p:spTree>
+      <p:nvGrpSpPr>
+        <p:cNvPr id="1" name=""/>
+        <p:cNvGrpSpPr/>
+        <p:nvPr/>
+      </p:nvGrpSpPr>
+      <p:grpSpPr/>
+      <p:sp>
+        <p:nvSpPr>
+          <p:cNvPr id="2" name="Title 1"/>
+          <p:cNvSpPr>
+            <a:spLocks noGrp="1"/>
+          </p:cNvSpPr>
+          <p:nvPr>
+            <p:ph type="title"/>
+          </p:nvPr>
+        </p:nvSpPr>
+        <p:spPr>
+          <a:xfrm>
+            <a:off x="457200" y="320040"/>
+            <a:ext cx="11247120" cy="731520"/>
+          </a:xfrm>
+        </p:spPr>
+        <p:txBody>
+          <a:bodyPr/>
+          <a:lstStyle/>
+          <a:p>
+            <a:r>
+              <a:t>Выручка регионов по месяцам</a:t>
+            </a:r>
+          </a:p>
+        </p:txBody>
+      </p:sp>
+      <p:graphicFrame>
+        <p:nvGraphicFramePr>
+          <p:cNvPr id="3" name="Таблица 4"/>
+          <p:cNvGraphicFramePr>
+            <a:graphicFrameLocks noGrp="1"/>
+          </p:cNvGraphicFramePr>
+          <p:nvPr/>
+        </p:nvGraphicFramePr>
+        <p:xfrm>
+          <a:off x="548640" y="1371600"/>
+          <a:ext cx="11064240" cy="2194560"/>
+        </p:xfrm>
+        <a:graphic>
+          <a:graphicData uri="http://schemas.openxmlformats.org/drawingml/2006/table">
+            <a:tbl>
+              <a:tblPr firstRow="1" bandRow="1">
+                <a:tableStyleId>{5C22544A-7EE6-4342-B048-85BDC9FD1C3A}</a:tableStyleId>
+              </a:tblPr>
+              <a:tblGrid>
+                <a:gridCol w="3383280"/>
+                <a:gridCol w="2560320"/>
+                <a:gridCol w="2560320"/>
+                <a:gridCol w="2560320"/>
+              </a:tblGrid>
+              <a:tr h="438912">
+                <a:tc>
+                  <a:txBody>
+                    <a:bodyPr/>
+                    <a:lstStyle/>
+                    <a:p>
+                      <a:r>
+                        <a:t>Регион</a:t>
+                      </a:r>
+                    </a:p>
+                  </a:txBody>
+                  <a:tcPr/>
+                </a:tc>
+                <a:tc>
+                  <a:txBody>
+                    <a:bodyPr/>
+                    <a:lstStyle/>
+                    <a:p>
+                      <a:r>
+                        <a:t>Месяц 1</a:t>
+                      </a:r>
+                    </a:p>
+                  </a:txBody>
+                  <a:tcPr/>
+                </a:tc>
+                <a:tc>
+                  <a:txBody>
+                    <a:bodyPr/>
+                    <a:lstStyle/>
+                    <a:p>
+                      <a:r>
+                        <a:t>Месяц 2</a:t>
+                      </a:r>
+                    </a:p>
+                  </a:txBody>
+                  <a:tcPr/>
+                </a:tc>
+                <a:tc>
+                  <a:txBody>
+                    <a:bodyPr/>
+                    <a:lstStyle/>
+                    <a:p>
+                      <a:r>
+                        <a:t>Месяц 3</a:t>
+                      </a:r>
+                    </a:p>
+                  </a:txBody>
+                  <a:tcPr/>
+                </a:tc>
+              </a:tr>
+              <a:tr h="438912">
+                <a:tc>
+                  <a:txBody>
+                    <a:bodyPr/>
+                    <a:lstStyle/>
+                    <a:p/>
+                  </a:txBody>
+                  <a:tcPr/>
+                </a:tc>
+                <a:tc>
+                  <a:txBody>
+                    <a:bodyPr/>
+                    <a:lstStyle/>
+                    <a:p/>
+                  </a:txBody>
+                  <a:tcPr/>
+                </a:tc>
+                <a:tc>
+                  <a:txBody>
+                    <a:bodyPr/>
+                    <a:lstStyle/>
+                    <a:p/>
+                  </a:txBody>
+                  <a:tcPr/>
+                </a:tc>
+                <a:tc>
+                  <a:txBody>
+                    <a:bodyPr/>
+                    <a:lstStyle/>
+                    <a:p/>
+                  </a:txBody>
+                  <a:tcPr/>
+                </a:tc>
+              </a:tr>
+              <a:tr h="438912">
+                <a:tc>
+                  <a:txBody>
+                    <a:bodyPr/>
+                    <a:lstStyle/>
+                    <a:p/>
+                  </a:txBody>
+                  <a:tcPr/>
+                </a:tc>
+                <a:tc>
+                  <a:txBody>
+                    <a:bodyPr/>
+                    <a:lstStyle/>
+                    <a:p/>
+                  </a:txBody>
+                  <a:tcPr/>
+                </a:tc>
+                <a:tc>
+                  <a:txBody>
+                    <a:bodyPr/>
+                    <a:lstStyle/>
+                    <a:p/>
+                  </a:txBody>
+                  <a:tcPr/>
+                </a:tc>
+                <a:tc>
+                  <a:txBody>
+                    <a:bodyPr/>
+                    <a:lstStyle/>
+                    <a:p/>
+                  </a:txBody>
+                  <a:tcPr/>
+                </a:tc>
+              </a:tr>
+              <a:tr h="438912">
+                <a:tc>
+                  <a:txBody>
+                    <a:bodyPr/>
+                    <a:lstStyle/>
+                    <a:p/>
+                  </a:txBody>
+                  <a:tcPr/>
+                </a:tc>
+                <a:tc>
+                  <a:txBody>
+                    <a:bodyPr/>
+                    <a:lstStyle/>
+                    <a:p/>
+                  </a:txBody>
+                  <a:tcPr/>
+                </a:tc>
+                <a:tc>
+                  <a:txBody>
+                    <a:bodyPr/>
+                    <a:lstStyle/>
+                    <a:p/>
+                  </a:txBody>
+                  <a:tcPr/>
+                </a:tc>
+                <a:tc>
+                  <a:txBody>
+                    <a:bodyPr/>
+                    <a:lstStyle/>
+                    <a:p/>
+                  </a:txBody>
+                  <a:tcPr/>
+                </a:tc>
+              </a:tr>
+              <a:tr h="438912">
+                <a:tc>
+                  <a:txBody>
+                    <a:bodyPr/>
+                    <a:lstStyle/>
+                    <a:p/>
+                  </a:txBody>
+                  <a:tcPr/>
+                </a:tc>
+                <a:tc>
+                  <a:txBody>
+                    <a:bodyPr/>
+                    <a:lstStyle/>
+                    <a:p/>
+                  </a:txBody>
+                  <a:tcPr/>
+                </a:tc>
+                <a:tc>
+                  <a:txBody>
+                    <a:bodyPr/>
+                    <a:lstStyle/>
+                    <a:p/>
+                  </a:txBody>
+                  <a:tcPr/>
+                </a:tc>
+                <a:tc>
+                  <a:txBody>
+                    <a:bodyPr/>
+                    <a:lstStyle/>
+                    <a:p/>
+                  </a:txBody>
+                  <a:tcPr/>
+                </a:tc>
+              </a:tr>
+            </a:tbl>
+          </a:graphicData>
+        </a:graphic>
+      </p:graphicFrame>
+      <p:sp>
+        <p:nvSpPr>
+          <p:cNvPr id="4" name="Сноска"/>
+          <p:cNvSpPr txBox="1"/>
+          <p:nvPr/>
+        </p:nvSpPr>
+        <p:spPr>
+          <a:xfrm>
+            <a:off x="548640" y="6035040"/>
+            <a:ext cx="7315200" cy="365760"/>
+          </a:xfrm>
+          <a:prstGeom prst="rect">
+            <a:avLst/>
+          </a:prstGeom>
+          <a:noFill/>
+        </p:spPr>
+        <p:txBody>
+          <a:bodyPr wrap="square">
+            <a:noAutofit/>
+          </a:bodyPr>
+          <a:lstStyle/>
+          <a:p>
+            <a:pPr algn="l"/>
+            <a:r>
+              <a:rPr lang="ru-RU" sz="1200" b="0">
+                <a:solidFill>
+                  <a:srgbClr val="2B2F47"/>
+                </a:solidFill>
+                <a:latin typeface="Arial"/>
+              </a:rPr>
+              <a:t>Источник: CRM, выручка без НДС, млн ₽</a:t>
+            </a:r>
+          </a:p>
+        </p:txBody>
+      </p:sp>
+      <p:graphicFrame>
+        <p:nvGraphicFramePr>
+          <p:cNvPr id="5" name="think-cell data - do not delete"/>
+          <p:cNvGraphicFramePr>
+            <a:graphicFrameLocks noGrp="1"/>
+          </p:cNvGraphicFramePr>
+          <p:nvPr/>
+        </p:nvGraphicFramePr>
+        <p:xfrm>
+          <a:off x="91440" y="91440"/>
+          <a:ext cx="91440" cy="91440"/>
+        </p:xfrm>
+        <a:graphic>
+          <a:graphicData uri="http://schemas.openxmlformats.org/presentationml/2006/ole">
+            <p:oleObj showAsIcon="1" r:id="rId2" imgW="965200" imgH="609600" progId="TCLayout.ActiveDocument.1">
+              <p:embed/>
+              <p:pic>
+                <p:nvPicPr>
+                  <p:cNvPr id="0" name=""/>
+                  <p:cNvPicPr/>
+                  <p:nvPr/>
+                </p:nvPicPr>
+                <p:blipFill>
+                  <a:blip r:embed="rId3"/>
+                  <a:stretch>
+                    <a:fillRect/>
+                  </a:stretch>
+                </p:blipFill>
+                <p:spPr>
+                  <a:xfrm>
+                    <a:off x="91440" y="91440"/>
+                    <a:ext cx="91440" cy="91440"/>
+                  </a:xfrm>
+                  <a:prstGeom prst="rect">
+                    <a:avLst/>
+                  </a:prstGeom>
+                </p:spPr>
+              </p:pic>
+            </p:oleObj>
+          </a:graphicData>
+        </a:graphic>
+      </p:graphicFrame>
+    </p:spTree>
+  </p:cSld>
+  <p:clrMapOvr>
+    <a:masterClrMapping/>
+  </p:clrMapOvr>
+</p:sld>
+</file>
+
+<file path=ppt/slides/slide7.xml><?xml version="1.0" encoding="utf-8"?>
+<p:sld xmlns:a="http://schemas.openxmlformats.org/drawingml/2006/main" xmlns:p="http://schemas.openxmlformats.org/presentationml/2006/main" xmlns:r="http://schemas.openxmlformats.org/officeDocument/2006/relationships">
+  <p:cSld>
+    <p:spTree>
+      <p:nvGrpSpPr>
+        <p:cNvPr id="1" name=""/>
+        <p:cNvGrpSpPr/>
+        <p:nvPr/>
+      </p:nvGrpSpPr>
+      <p:grpSpPr/>
+      <p:sp>
+        <p:nvSpPr>
+          <p:cNvPr id="2" name="Заголовок 1"/>
+          <p:cNvSpPr txBox="1"/>
+          <p:nvPr/>
+        </p:nvSpPr>
+        <p:spPr>
+          <a:xfrm>
+            <a:off x="457200" y="320040"/>
+            <a:ext cx="11247120" cy="731520"/>
+          </a:xfrm>
+          <a:prstGeom prst="rect">
+            <a:avLst/>
+          </a:prstGeom>
+          <a:noFill/>
+        </p:spPr>
+        <p:txBody>
+          <a:bodyPr wrap="square">
+            <a:noAutofit/>
+          </a:bodyPr>
+          <a:lstStyle/>
+          <a:p>
+            <a:pPr algn="ctr"/>
+            <a:r>
+              <a:rPr lang="ru-RU" sz="2800" b="1">
+                <a:solidFill>
+                  <a:srgbClr val="2B2F47"/>
+                </a:solidFill>
+                <a:latin typeface="Arial"/>
+              </a:rPr>
+              <a:t>Черновик</a:t>
+            </a:r>
+          </a:p>
+        </p:txBody>
+      </p:sp>
+      <p:sp>
+        <p:nvSpPr>
+          <p:cNvPr id="3" name="Заголовок 1"/>
+          <p:cNvSpPr txBox="1"/>
+          <p:nvPr/>
+        </p:nvSpPr>
+        <p:spPr>
+          <a:xfrm>
+            <a:off x="457200" y="320040"/>
+            <a:ext cx="11247120" cy="731520"/>
+          </a:xfrm>
+          <a:prstGeom prst="rect">
+            <a:avLst/>
+          </a:prstGeom>
+          <a:noFill/>
+        </p:spPr>
+        <p:txBody>
+          <a:bodyPr wrap="square">
+            <a:noAutofit/>
+          </a:bodyPr>
+          <a:lstStyle/>
+          <a:p>
+            <a:pPr algn="ctr"/>
+            <a:r>
+              <a:rPr lang="ru-RU" sz="2800" b="1">
+                <a:solidFill>
+                  <a:srgbClr val="2B2F47"/>
+                </a:solidFill>
+                <a:latin typeface="Arial"/>
+              </a:rPr>
+              <a:t>Повтор имени</a:t>
+            </a:r>
+          </a:p>
+        </p:txBody>
+      </p:sp>
+      <p:sp>
+        <p:nvSpPr>
+          <p:cNvPr id="4" name="Вписанный год"/>
+          <p:cNvSpPr txBox="1"/>
+          <p:nvPr/>
+        </p:nvSpPr>
+        <p:spPr>
+          <a:xfrm>
+            <a:off x="548640" y="1280160"/>
+            <a:ext cx="7315200" cy="548640"/>
+          </a:xfrm>
+          <a:prstGeom prst="rect">
+            <a:avLst/>
+          </a:prstGeom>
+          <a:noFill/>
+        </p:spPr>
+        <p:txBody>
+          <a:bodyPr wrap="square">
+            <a:noAutofit/>
+          </a:bodyPr>
+          <a:lstStyle/>
+          <a:p>
+            <a:pPr algn="l"/>
+            <a:r>
+              <a:rPr lang="ru-RU" sz="1800" b="0">
+                <a:solidFill>
+                  <a:srgbClr val="2B2F47"/>
+                </a:solidFill>
+                <a:latin typeface="Arial"/>
+              </a:rPr>
+              <a:t>Рост к </a:t>
+            </a:r>
+            <a:r>
+              <a:rPr lang="en-US" sz="1800" b="0">
+                <a:solidFill>
+                  <a:srgbClr val="2B2F47"/>
+                </a:solidFill>
+                <a:latin typeface="Arial"/>
+              </a:rPr>
+              <a:t>{{</a:t>
+            </a:r>
+            <a:r>
+              <a:rPr lang="ru-RU" sz="1800" b="0">
+                <a:solidFill>
+                  <a:srgbClr val="2B2F47"/>
+                </a:solidFill>
+                <a:latin typeface="Arial"/>
+              </a:rPr>
+              <a:t>Месяц</a:t>
+            </a:r>
+            <a:r>
+              <a:rPr lang="en-US" sz="1800" b="0">
+                <a:solidFill>
+                  <a:srgbClr val="2B2F47"/>
+                </a:solidFill>
+                <a:latin typeface="Arial"/>
+              </a:rPr>
+              <a:t>}}</a:t>
+            </a:r>
+            <a:r>
+              <a:rPr lang="ru-RU" sz="1800" b="0">
+                <a:solidFill>
+                  <a:srgbClr val="2B2F47"/>
+                </a:solidFill>
+                <a:latin typeface="Arial"/>
+              </a:rPr>
+              <a:t> 2025</a:t>
+            </a:r>
+          </a:p>
+        </p:txBody>
+      </p:sp>
+      <p:sp>
+        <p:nvSpPr>
+          <p:cNvPr id="5" name="Ссылка на слайд"/>
+          <p:cNvSpPr txBox="1"/>
+          <p:nvPr/>
+        </p:nvSpPr>
+        <p:spPr>
+          <a:xfrm>
+            <a:off x="548640" y="1920240"/>
+            <a:ext cx="7315200" cy="548640"/>
+          </a:xfrm>
+          <a:prstGeom prst="rect">
+            <a:avLst/>
+          </a:prstGeom>
+          <a:noFill/>
+        </p:spPr>
+        <p:txBody>
+          <a:bodyPr wrap="square">
+            <a:noAutofit/>
+          </a:bodyPr>
+          <a:lstStyle/>
+          <a:p>
+            <a:pPr algn="l"/>
+            <a:r>
+              <a:rPr lang="ru-RU" sz="1800" b="0">
+                <a:solidFill>
+                  <a:srgbClr val="2B2F47"/>
+                </a:solidFill>
+                <a:latin typeface="Arial"/>
+              </a:rPr>
+              <a:t>Подробнее — на слайде 2</a:t>
+            </a:r>
+          </a:p>
+        </p:txBody>
+      </p:sp>
+      <p:sp>
+        <p:nvSpPr>
+          <p:cNvPr id="6" name="Метка с переносом"/>
+          <p:cNvSpPr txBox="1"/>
+          <p:nvPr/>
+        </p:nvSpPr>
+        <p:spPr>
+          <a:xfrm>
+            <a:off x="548640" y="2560320"/>
+            <a:ext cx="7315200" cy="822960"/>
+          </a:xfrm>
+          <a:prstGeom prst="rect">
+            <a:avLst/>
+          </a:prstGeom>
+          <a:noFill/>
+        </p:spPr>
+        <p:txBody>
+          <a:bodyPr wrap="square">
+            <a:noAutofit/>
+          </a:bodyPr>
+          <a:lstStyle/>
+          <a:p>
+            <a:pPr algn="l"/>
+            <a:r>
+              <a:rPr lang="ru-RU" sz="1800" b="0">
+                <a:solidFill>
+                  <a:srgbClr val="2B2F47"/>
+                </a:solidFill>
+                <a:latin typeface="Arial"/>
+              </a:rPr>
+              <a:t>{{Ме</a:t>
+            </a:r>
+            <a:br/>
+            <a:r>
+              <a:rPr lang="ru-RU" sz="1800">
+                <a:solidFill>
+                  <a:srgbClr val="2B2F47"/>
+                </a:solidFill>
+                <a:latin typeface="Arial"/>
+              </a:rPr>
+              <a:t>сяц}}</a:t>
+            </a:r>
+          </a:p>
+        </p:txBody>
+      </p:sp>
+      <p:sp>
+        <p:nvSpPr>
+          <p:cNvPr id="7" name="За краем"/>
+          <p:cNvSpPr txBox="1"/>
+          <p:nvPr/>
+        </p:nvSpPr>
+        <p:spPr>
+          <a:xfrm>
+            <a:off x="11155680" y="3657600"/>
+            <a:ext cx="1828800" cy="548640"/>
+          </a:xfrm>
+          <a:prstGeom prst="rect">
+            <a:avLst/>
+          </a:prstGeom>
+          <a:noFill/>
+        </p:spPr>
+        <p:txBody>
+          <a:bodyPr wrap="square">
+            <a:noAutofit/>
+          </a:bodyPr>
+          <a:lstStyle/>
+          <a:p>
+            <a:pPr algn="l"/>
+            <a:r>
+              <a:rPr lang="en-US" sz="1800" b="0">
+                <a:solidFill>
+                  <a:srgbClr val="2B2F47"/>
+                </a:solidFill>
+                <a:latin typeface="Arial"/>
+              </a:rPr>
+              <a:t>{{</a:t>
+            </a:r>
+            <a:r>
+              <a:rPr lang="ru-RU" sz="1800" b="0">
+                <a:solidFill>
+                  <a:srgbClr val="2B2F47"/>
+                </a:solidFill>
+                <a:latin typeface="Arial"/>
+              </a:rPr>
+              <a:t>Год</a:t>
+            </a:r>
+            <a:r>
+              <a:rPr lang="en-US" sz="1800" b="0">
+                <a:solidFill>
+                  <a:srgbClr val="2B2F47"/>
+                </a:solidFill>
+                <a:latin typeface="Arial"/>
+              </a:rPr>
+              <a:t>}}</a:t>
+            </a:r>
+          </a:p>
+        </p:txBody>
+      </p:sp>
+      <p:graphicFrame>
+        <p:nvGraphicFramePr>
+          <p:cNvPr id="8" name="Диаграмма 12"/>
+          <p:cNvGraphicFramePr>
+            <a:graphicFrameLocks noGrp="1"/>
+          </p:cNvGraphicFramePr>
+          <p:nvPr/>
+        </p:nvGraphicFramePr>
+        <p:xfrm>
+          <a:off x="548640" y="3657600"/>
+          <a:ext cx="5486400" cy="2743200"/>
+        </p:xfrm>
+        <a:graphic>
+          <a:graphicData uri="http://schemas.openxmlformats.org/drawingml/2006/chart">
+            <c:chart xmlns:c="http://schemas.openxmlformats.org/drawingml/2006/chart" r:id="rId2"/>
+          </a:graphicData>
+        </a:graphic>
+      </p:graphicFrame>
+    </p:spTree>
+  </p:cSld>
+  <p:clrMapOvr>
+    <a:masterClrMapping/>
+  </p:clrMapOvr>
+</p:sld>
+</file>
+
+<file path=ppt/slides/slide8.xml><?xml version="1.0" encoding="utf-8"?>
+<p:sld xmlns:a="http://schemas.openxmlformats.org/drawingml/2006/main" xmlns:p="http://schemas.openxmlformats.org/presentationml/2006/main" xmlns:r="http://schemas.openxmlformats.org/officeDocument/2006/relationships">
+  <p:cSld>
+    <p:spTree>
+      <p:nvGrpSpPr>
+        <p:cNvPr id="1" name=""/>
+        <p:cNvGrpSpPr/>
+        <p:nvPr/>
+      </p:nvGrpSpPr>
+      <p:grpSpPr/>
+      <p:sp>
+        <p:nvSpPr>
+          <p:cNvPr id="2" name="Спасибо"/>
+          <p:cNvSpPr txBox="1"/>
+          <p:nvPr/>
+        </p:nvSpPr>
+        <p:spPr>
+          <a:xfrm>
+            <a:off x="3200400" y="3931920"/>
+            <a:ext cx="5760720" cy="731520"/>
+          </a:xfrm>
+          <a:prstGeom prst="rect">
+            <a:avLst/>
+          </a:prstGeom>
+          <a:noFill/>
+        </p:spPr>
+        <p:txBody>
+          <a:bodyPr wrap="square">
+            <a:noAutofit/>
+          </a:bodyPr>
+          <a:lstStyle/>
+          <a:p>
+            <a:pPr algn="ctr"/>
+            <a:r>
+              <a:rPr lang="ru-RU" sz="3200" b="1">
+                <a:solidFill>
+                  <a:srgbClr val="2B2F47"/>
+                </a:solidFill>
+                <a:latin typeface="Arial"/>
+              </a:rPr>
+              <a:t>Спасибо!</a:t>
+            </a:r>
+          </a:p>
+        </p:txBody>
+      </p:sp>
+    </p:spTree>
+  </p:cSld>
+  <p:clrMapOvr>
+    <a:masterClrMapping/>
+  </p:clrMapOvr>
+</p:sld>
+</file>
+
+<file path=ppt/tags/tag1.xml><?xml version="1.0" encoding="utf-8"?>
+<ns0:tagLst xmlns:ns0="http://schemas.openxmlformats.org/presentationml/2006/main">
+  <ns0:tag name="TCLAYOUT" val="Синтетика"/>
+</ns0:tagLst>
 </file>
 
 <file path=ppt/theme/theme1.xml><?xml version="1.0" encoding="utf-8"?>
@@ -3539,4 +8402,644 @@
   </a:objectDefaults>
   <a:extraClrSchemeLst/>
 </a:theme>
+</file>
+
+<file path=ppt/theme/theme2.xml><?xml version="1.0" encoding="utf-8"?>
+<a:theme xmlns:a="http://schemas.openxmlformats.org/drawingml/2006/main" name="Office Theme">
+  <a:themeElements>
+    <a:clrScheme name="Autogenerator">
+      <a:dk1>
+        <a:sysClr val="windowText" lastClr="000000"/>
+      </a:dk1>
+      <a:lt1>
+        <a:sysClr val="window" lastClr="FFFFFF"/>
+      </a:lt1>
+      <a:dk2>
+        <a:srgbClr val="1F497D"/>
+      </a:dk2>
+      <a:lt2>
+        <a:srgbClr val="EEECE1"/>
+      </a:lt2>
+      <a:accent1>
+        <a:srgbClr val="1F4E79"/>
+      </a:accent1>
+      <a:accent2>
+        <a:srgbClr val="F28C28"/>
+      </a:accent2>
+      <a:accent3>
+        <a:srgbClr val="2E8B57"/>
+      </a:accent3>
+      <a:accent4>
+        <a:srgbClr val="7F7F7F"/>
+      </a:accent4>
+      <a:accent5>
+        <a:srgbClr val="5B9BD5"/>
+      </a:accent5>
+      <a:accent6>
+        <a:srgbClr val="C00000"/>
+      </a:accent6>
+      <a:hlink>
+        <a:srgbClr val="0000FF"/>
+      </a:hlink>
+      <a:folHlink>
+        <a:srgbClr val="800080"/>
+      </a:folHlink>
+    </a:clrScheme>
+    <a:fontScheme name="Office">
+      <a:majorFont>
+        <a:latin typeface="Calibri"/>
+        <a:ea typeface=""/>
+        <a:cs typeface=""/>
+        <a:font script="Jpan" typeface="ＭＳ Ｐゴシック"/>
+        <a:font script="Hang" typeface="맑은 고딕"/>
+        <a:font script="Hans" typeface="宋体"/>
+        <a:font script="Hant" typeface="新細明體"/>
+        <a:font script="Arab" typeface="Times New Roman"/>
+        <a:font script="Hebr" typeface="Times New Roman"/>
+        <a:font script="Thai" typeface="Angsana New"/>
+        <a:font script="Ethi" typeface="Nyala"/>
+        <a:font script="Beng" typeface="Vrinda"/>
+        <a:font script="Gujr" typeface="Shruti"/>
+        <a:font script="Khmr" typeface="MoolBoran"/>
+        <a:font script="Knda" typeface="Tunga"/>
+        <a:font script="Guru" typeface="Raavi"/>
+        <a:font script="Cans" typeface="Euphemia"/>
+        <a:font script="Cher" typeface="Plantagenet Cherokee"/>
+        <a:font script="Yiii" typeface="Microsoft Yi Baiti"/>
+        <a:font script="Tibt" typeface="Microsoft Himalaya"/>
+        <a:font script="Thaa" typeface="MV Boli"/>
+        <a:font script="Deva" typeface="Mangal"/>
+        <a:font script="Telu" typeface="Gautami"/>
+        <a:font script="Taml" typeface="Latha"/>
+        <a:font script="Syrc" typeface="Estrangelo Edessa"/>
+        <a:font script="Orya" typeface="Kalinga"/>
+        <a:font script="Mlym" typeface="Kartika"/>
+        <a:font script="Laoo" typeface="DokChampa"/>
+        <a:font script="Sinh" typeface="Iskoola Pota"/>
+        <a:font script="Mong" typeface="Mongolian Baiti"/>
+        <a:font script="Viet" typeface="Times New Roman"/>
+        <a:font script="Uigh" typeface="Microsoft Uighur"/>
+        <a:font script="Geor" typeface="Sylfaen"/>
+      </a:majorFont>
+      <a:minorFont>
+        <a:latin typeface="Calibri"/>
+        <a:ea typeface=""/>
+        <a:cs typeface=""/>
+        <a:font script="Jpan" typeface="ＭＳ Ｐゴシック"/>
+        <a:font script="Hang" typeface="맑은 고딕"/>
+        <a:font script="Hans" typeface="宋体"/>
+        <a:font script="Hant" typeface="新細明體"/>
+        <a:font script="Arab" typeface="Arial"/>
+        <a:font script="Hebr" typeface="Arial"/>
+        <a:font script="Thai" typeface="Cordia New"/>
+        <a:font script="Ethi" typeface="Nyala"/>
+        <a:font script="Beng" typeface="Vrinda"/>
+        <a:font script="Gujr" typeface="Shruti"/>
+        <a:font script="Khmr" typeface="DaunPenh"/>
+        <a:font script="Knda" typeface="Tunga"/>
+        <a:font script="Guru" typeface="Raavi"/>
+        <a:font script="Cans" typeface="Euphemia"/>
+        <a:font script="Cher" typeface="Plantagenet Cherokee"/>
+        <a:font script="Yiii" typeface="Microsoft Yi Baiti"/>
+        <a:font script="Tibt" typeface="Microsoft Himalaya"/>
+        <a:font script="Thaa" typeface="MV Boli"/>
+        <a:font script="Deva" typeface="Mangal"/>
+        <a:font script="Telu" typeface="Gautami"/>
+        <a:font script="Taml" typeface="Latha"/>
+        <a:font script="Syrc" typeface="Estrangelo Edessa"/>
+        <a:font script="Orya" typeface="Kalinga"/>
+        <a:font script="Mlym" typeface="Kartika"/>
+        <a:font script="Laoo" typeface="DokChampa"/>
+        <a:font script="Sinh" typeface="Iskoola Pota"/>
+        <a:font script="Mong" typeface="Mongolian Baiti"/>
+        <a:font script="Viet" typeface="Arial"/>
+        <a:font script="Uigh" typeface="Microsoft Uighur"/>
+        <a:font script="Geor" typeface="Sylfaen"/>
+      </a:minorFont>
+    </a:fontScheme>
+    <a:fmtScheme name="Office">
+      <a:fillStyleLst>
+        <a:solidFill>
+          <a:schemeClr val="phClr"/>
+        </a:solidFill>
+        <a:gradFill rotWithShape="1">
+          <a:gsLst>
+            <a:gs pos="0">
+              <a:schemeClr val="phClr">
+                <a:tint val="50000"/>
+                <a:satMod val="300000"/>
+              </a:schemeClr>
+            </a:gs>
+            <a:gs pos="35000">
+              <a:schemeClr val="phClr">
+                <a:tint val="37000"/>
+                <a:satMod val="300000"/>
+              </a:schemeClr>
+            </a:gs>
+            <a:gs pos="100000">
+              <a:schemeClr val="phClr">
+                <a:tint val="15000"/>
+                <a:satMod val="350000"/>
+              </a:schemeClr>
+            </a:gs>
+          </a:gsLst>
+          <a:lin ang="16200000" scaled="1"/>
+        </a:gradFill>
+        <a:gradFill rotWithShape="1">
+          <a:gsLst>
+            <a:gs pos="0">
+              <a:schemeClr val="phClr">
+                <a:tint val="100000"/>
+                <a:shade val="100000"/>
+                <a:satMod val="130000"/>
+              </a:schemeClr>
+            </a:gs>
+            <a:gs pos="100000">
+              <a:schemeClr val="phClr">
+                <a:tint val="50000"/>
+                <a:shade val="100000"/>
+                <a:satMod val="350000"/>
+              </a:schemeClr>
+            </a:gs>
+          </a:gsLst>
+          <a:lin ang="16200000" scaled="0"/>
+        </a:gradFill>
+      </a:fillStyleLst>
+      <a:lnStyleLst>
+        <a:ln w="9525" cap="flat" cmpd="sng" algn="ctr">
+          <a:solidFill>
+            <a:schemeClr val="phClr">
+              <a:shade val="95000"/>
+              <a:satMod val="105000"/>
+            </a:schemeClr>
+          </a:solidFill>
+          <a:prstDash val="solid"/>
+        </a:ln>
+        <a:ln w="25400" cap="flat" cmpd="sng" algn="ctr">
+          <a:solidFill>
+            <a:schemeClr val="phClr"/>
+          </a:solidFill>
+          <a:prstDash val="solid"/>
+        </a:ln>
+        <a:ln w="38100" cap="flat" cmpd="sng" algn="ctr">
+          <a:solidFill>
+            <a:schemeClr val="phClr"/>
+          </a:solidFill>
+          <a:prstDash val="solid"/>
+        </a:ln>
+      </a:lnStyleLst>
+      <a:effectStyleLst>
+        <a:effectStyle>
+          <a:effectLst>
+            <a:outerShdw blurRad="40000" dist="20000" dir="5400000" rotWithShape="0">
+              <a:srgbClr val="000000">
+                <a:alpha val="38000"/>
+              </a:srgbClr>
+            </a:outerShdw>
+          </a:effectLst>
+        </a:effectStyle>
+        <a:effectStyle>
+          <a:effectLst>
+            <a:outerShdw blurRad="40000" dist="23000" dir="5400000" rotWithShape="0">
+              <a:srgbClr val="000000">
+                <a:alpha val="35000"/>
+              </a:srgbClr>
+            </a:outerShdw>
+          </a:effectLst>
+        </a:effectStyle>
+        <a:effectStyle>
+          <a:effectLst>
+            <a:outerShdw blurRad="40000" dist="23000" dir="5400000" rotWithShape="0">
+              <a:srgbClr val="000000">
+                <a:alpha val="35000"/>
+              </a:srgbClr>
+            </a:outerShdw>
+          </a:effectLst>
+          <a:scene3d>
+            <a:camera prst="orthographicFront">
+              <a:rot lat="0" lon="0" rev="0"/>
+            </a:camera>
+            <a:lightRig rig="threePt" dir="t">
+              <a:rot lat="0" lon="0" rev="1200000"/>
+            </a:lightRig>
+          </a:scene3d>
+          <a:sp3d>
+            <a:bevelT w="63500" h="25400"/>
+          </a:sp3d>
+        </a:effectStyle>
+      </a:effectStyleLst>
+      <a:bgFillStyleLst>
+        <a:solidFill>
+          <a:schemeClr val="phClr"/>
+        </a:solidFill>
+        <a:gradFill rotWithShape="1">
+          <a:gsLst>
+            <a:gs pos="0">
+              <a:schemeClr val="phClr">
+                <a:tint val="40000"/>
+                <a:satMod val="350000"/>
+              </a:schemeClr>
+            </a:gs>
+            <a:gs pos="40000">
+              <a:schemeClr val="phClr">
+                <a:tint val="45000"/>
+                <a:shade val="99000"/>
+                <a:satMod val="350000"/>
+              </a:schemeClr>
+            </a:gs>
+            <a:gs pos="100000">
+              <a:schemeClr val="phClr">
+                <a:shade val="20000"/>
+                <a:satMod val="255000"/>
+              </a:schemeClr>
+            </a:gs>
+          </a:gsLst>
+          <a:path path="circle">
+            <a:fillToRect l="50000" t="-80000" r="50000" b="180000"/>
+          </a:path>
+        </a:gradFill>
+        <a:gradFill rotWithShape="1">
+          <a:gsLst>
+            <a:gs pos="0">
+              <a:schemeClr val="phClr">
+                <a:tint val="80000"/>
+                <a:satMod val="300000"/>
+              </a:schemeClr>
+            </a:gs>
+            <a:gs pos="100000">
+              <a:schemeClr val="phClr">
+                <a:shade val="30000"/>
+                <a:satMod val="200000"/>
+              </a:schemeClr>
+            </a:gs>
+          </a:gsLst>
+          <a:path path="circle">
+            <a:fillToRect l="50000" t="50000" r="50000" b="50000"/>
+          </a:path>
+        </a:gradFill>
+      </a:bgFillStyleLst>
+    </a:fmtScheme>
+  </a:themeElements>
+  <a:objectDefaults>
+    <a:spDef>
+      <a:spPr/>
+      <a:bodyPr/>
+      <a:lstStyle/>
+      <a:style>
+        <a:lnRef idx="1">
+          <a:schemeClr val="accent1"/>
+        </a:lnRef>
+        <a:fillRef idx="3">
+          <a:schemeClr val="accent1"/>
+        </a:fillRef>
+        <a:effectRef idx="2">
+          <a:schemeClr val="accent1"/>
+        </a:effectRef>
+        <a:fontRef idx="minor">
+          <a:schemeClr val="lt1"/>
+        </a:fontRef>
+      </a:style>
+    </a:spDef>
+    <a:lnDef>
+      <a:spPr/>
+      <a:bodyPr/>
+      <a:lstStyle/>
+      <a:style>
+        <a:lnRef idx="2">
+          <a:schemeClr val="accent1"/>
+        </a:lnRef>
+        <a:fillRef idx="0">
+          <a:schemeClr val="accent1"/>
+        </a:fillRef>
+        <a:effectRef idx="1">
+          <a:schemeClr val="accent1"/>
+        </a:effectRef>
+        <a:fontRef idx="minor">
+          <a:schemeClr val="tx1"/>
+        </a:fontRef>
+      </a:style>
+    </a:lnDef>
+  </a:objectDefaults>
+  <a:extraClrSchemeLst/>
+</a:theme>
+</file>
+
+<file path=ppt/theme/theme3.xml><?xml version="1.0" encoding="utf-8"?>
+<a:theme xmlns:a="http://schemas.openxmlformats.org/drawingml/2006/main" name="Office Theme">
+  <a:themeElements>
+    <a:clrScheme name="Office">
+      <a:dk1>
+        <a:sysClr val="windowText" lastClr="000000"/>
+      </a:dk1>
+      <a:lt1>
+        <a:sysClr val="window" lastClr="FFFFFF"/>
+      </a:lt1>
+      <a:dk2>
+        <a:srgbClr val="1F497D"/>
+      </a:dk2>
+      <a:lt2>
+        <a:srgbClr val="EEECE1"/>
+      </a:lt2>
+      <a:accent1>
+        <a:srgbClr val="4F81BD"/>
+      </a:accent1>
+      <a:accent2>
+        <a:srgbClr val="C0504D"/>
+      </a:accent2>
+      <a:accent3>
+        <a:srgbClr val="9BBB59"/>
+      </a:accent3>
+      <a:accent4>
+        <a:srgbClr val="8064A2"/>
+      </a:accent4>
+      <a:accent5>
+        <a:srgbClr val="4BACC6"/>
+      </a:accent5>
+      <a:accent6>
+        <a:srgbClr val="F79646"/>
+      </a:accent6>
+      <a:hlink>
+        <a:srgbClr val="0000FF"/>
+      </a:hlink>
+      <a:folHlink>
+        <a:srgbClr val="800080"/>
+      </a:folHlink>
+    </a:clrScheme>
+    <a:fontScheme name="Office">
+      <a:majorFont>
+        <a:latin typeface="Calibri"/>
+        <a:ea typeface=""/>
+        <a:cs typeface=""/>
+        <a:font script="Jpan" typeface="ＭＳ Ｐゴシック"/>
+        <a:font script="Hang" typeface="맑은 고딕"/>
+        <a:font script="Hans" typeface="宋体"/>
+        <a:font script="Hant" typeface="新細明體"/>
+        <a:font script="Arab" typeface="Times New Roman"/>
+        <a:font script="Hebr" typeface="Times New Roman"/>
+        <a:font script="Thai" typeface="Angsana New"/>
+        <a:font script="Ethi" typeface="Nyala"/>
+        <a:font script="Beng" typeface="Vrinda"/>
+        <a:font script="Gujr" typeface="Shruti"/>
+        <a:font script="Khmr" typeface="MoolBoran"/>
+        <a:font script="Knda" typeface="Tunga"/>
+        <a:font script="Guru" typeface="Raavi"/>
+        <a:font script="Cans" typeface="Euphemia"/>
+        <a:font script="Cher" typeface="Plantagenet Cherokee"/>
+        <a:font script="Yiii" typeface="Microsoft Yi Baiti"/>
+        <a:font script="Tibt" typeface="Microsoft Himalaya"/>
+        <a:font script="Thaa" typeface="MV Boli"/>
+        <a:font script="Deva" typeface="Mangal"/>
+        <a:font script="Telu" typeface="Gautami"/>
+        <a:font script="Taml" typeface="Latha"/>
+        <a:font script="Syrc" typeface="Estrangelo Edessa"/>
+        <a:font script="Orya" typeface="Kalinga"/>
+        <a:font script="Mlym" typeface="Kartika"/>
+        <a:font script="Laoo" typeface="DokChampa"/>
+        <a:font script="Sinh" typeface="Iskoola Pota"/>
+        <a:font script="Mong" typeface="Mongolian Baiti"/>
+        <a:font script="Viet" typeface="Times New Roman"/>
+        <a:font script="Uigh" typeface="Microsoft Uighur"/>
+        <a:font script="Geor" typeface="Sylfaen"/>
+      </a:majorFont>
+      <a:minorFont>
+        <a:latin typeface="Calibri"/>
+        <a:ea typeface=""/>
+        <a:cs typeface=""/>
+        <a:font script="Jpan" typeface="ＭＳ Ｐゴシック"/>
+        <a:font script="Hang" typeface="맑은 고딕"/>
+        <a:font script="Hans" typeface="宋体"/>
+        <a:font script="Hant" typeface="新細明體"/>
+        <a:font script="Arab" typeface="Arial"/>
+        <a:font script="Hebr" typeface="Arial"/>
+        <a:font script="Thai" typeface="Cordia New"/>
+        <a:font script="Ethi" typeface="Nyala"/>
+        <a:font script="Beng" typeface="Vrinda"/>
+        <a:font script="Gujr" typeface="Shruti"/>
+        <a:font script="Khmr" typeface="DaunPenh"/>
+        <a:font script="Knda" typeface="Tunga"/>
+        <a:font script="Guru" typeface="Raavi"/>
+        <a:font script="Cans" typeface="Euphemia"/>
+        <a:font script="Cher" typeface="Plantagenet Cherokee"/>
+        <a:font script="Yiii" typeface="Microsoft Yi Baiti"/>
+        <a:font script="Tibt" typeface="Microsoft Himalaya"/>
+        <a:font script="Thaa" typeface="MV Boli"/>
+        <a:font script="Deva" typeface="Mangal"/>
+        <a:font script="Telu" typeface="Gautami"/>
+        <a:font script="Taml" typeface="Latha"/>
+        <a:font script="Syrc" typeface="Estrangelo Edessa"/>
+        <a:font script="Orya" typeface="Kalinga"/>
+        <a:font script="Mlym" typeface="Kartika"/>
+        <a:font script="Laoo" typeface="DokChampa"/>
+        <a:font script="Sinh" typeface="Iskoola Pota"/>
+        <a:font script="Mong" typeface="Mongolian Baiti"/>
+        <a:font script="Viet" typeface="Arial"/>
+        <a:font script="Uigh" typeface="Microsoft Uighur"/>
+        <a:font script="Geor" typeface="Sylfaen"/>
+      </a:minorFont>
+    </a:fontScheme>
+    <a:fmtScheme name="Office">
+      <a:fillStyleLst>
+        <a:solidFill>
+          <a:schemeClr val="phClr"/>
+        </a:solidFill>
+        <a:gradFill rotWithShape="1">
+          <a:gsLst>
+            <a:gs pos="0">
+              <a:schemeClr val="phClr">
+                <a:tint val="50000"/>
+                <a:satMod val="300000"/>
+              </a:schemeClr>
+            </a:gs>
+            <a:gs pos="35000">
+              <a:schemeClr val="phClr">
+                <a:tint val="37000"/>
+                <a:satMod val="300000"/>
+              </a:schemeClr>
+            </a:gs>
+            <a:gs pos="100000">
+              <a:schemeClr val="phClr">
+                <a:tint val="15000"/>
+                <a:satMod val="350000"/>
+              </a:schemeClr>
+            </a:gs>
+          </a:gsLst>
+          <a:lin ang="16200000" scaled="1"/>
+        </a:gradFill>
+        <a:gradFill rotWithShape="1">
+          <a:gsLst>
+            <a:gs pos="0">
+              <a:schemeClr val="phClr">
+                <a:tint val="100000"/>
+                <a:shade val="100000"/>
+                <a:satMod val="130000"/>
+              </a:schemeClr>
+            </a:gs>
+            <a:gs pos="100000">
+              <a:schemeClr val="phClr">
+                <a:tint val="50000"/>
+                <a:shade val="100000"/>
+                <a:satMod val="350000"/>
+              </a:schemeClr>
+            </a:gs>
+          </a:gsLst>
+          <a:lin ang="16200000" scaled="0"/>
+        </a:gradFill>
+      </a:fillStyleLst>
+      <a:lnStyleLst>
+        <a:ln w="9525" cap="flat" cmpd="sng" algn="ctr">
+          <a:solidFill>
+            <a:schemeClr val="phClr">
+              <a:shade val="95000"/>
+              <a:satMod val="105000"/>
+            </a:schemeClr>
+          </a:solidFill>
+          <a:prstDash val="solid"/>
+        </a:ln>
+        <a:ln w="25400" cap="flat" cmpd="sng" algn="ctr">
+          <a:solidFill>
+            <a:schemeClr val="phClr"/>
+          </a:solidFill>
+          <a:prstDash val="solid"/>
+        </a:ln>
+        <a:ln w="38100" cap="flat" cmpd="sng" algn="ctr">
+          <a:solidFill>
+            <a:schemeClr val="phClr"/>
+          </a:solidFill>
+          <a:prstDash val="solid"/>
+        </a:ln>
+      </a:lnStyleLst>
+      <a:effectStyleLst>
+        <a:effectStyle>
+          <a:effectLst>
+            <a:outerShdw blurRad="40000" dist="20000" dir="5400000" rotWithShape="0">
+              <a:srgbClr val="000000">
+                <a:alpha val="38000"/>
+              </a:srgbClr>
+            </a:outerShdw>
+          </a:effectLst>
+        </a:effectStyle>
+        <a:effectStyle>
+          <a:effectLst>
+            <a:outerShdw blurRad="40000" dist="23000" dir="5400000" rotWithShape="0">
+              <a:srgbClr val="000000">
+                <a:alpha val="35000"/>
+              </a:srgbClr>
+            </a:outerShdw>
+          </a:effectLst>
+        </a:effectStyle>
+        <a:effectStyle>
+          <a:effectLst>
+            <a:outerShdw blurRad="40000" dist="23000" dir="5400000" rotWithShape="0">
+              <a:srgbClr val="000000">
+                <a:alpha val="35000"/>
+              </a:srgbClr>
+            </a:outerShdw>
+          </a:effectLst>
+          <a:scene3d>
+            <a:camera prst="orthographicFront">
+              <a:rot lat="0" lon="0" rev="0"/>
+            </a:camera>
+            <a:lightRig rig="threePt" dir="t">
+              <a:rot lat="0" lon="0" rev="1200000"/>
+            </a:lightRig>
+          </a:scene3d>
+          <a:sp3d>
+            <a:bevelT w="63500" h="25400"/>
+          </a:sp3d>
+        </a:effectStyle>
+      </a:effectStyleLst>
+      <a:bgFillStyleLst>
+        <a:solidFill>
+          <a:schemeClr val="phClr"/>
+        </a:solidFill>
+        <a:gradFill rotWithShape="1">
+          <a:gsLst>
+            <a:gs pos="0">
+              <a:schemeClr val="phClr">
+                <a:tint val="40000"/>
+                <a:satMod val="350000"/>
+              </a:schemeClr>
+            </a:gs>
+            <a:gs pos="40000">
+              <a:schemeClr val="phClr">
+                <a:tint val="45000"/>
+                <a:shade val="99000"/>
+                <a:satMod val="350000"/>
+              </a:schemeClr>
+            </a:gs>
+            <a:gs pos="100000">
+              <a:schemeClr val="phClr">
+                <a:shade val="20000"/>
+                <a:satMod val="255000"/>
+              </a:schemeClr>
+            </a:gs>
+          </a:gsLst>
+          <a:path path="circle">
+            <a:fillToRect l="50000" t="-80000" r="50000" b="180000"/>
+          </a:path>
+        </a:gradFill>
+        <a:gradFill rotWithShape="1">
+          <a:gsLst>
+            <a:gs pos="0">
+              <a:schemeClr val="phClr">
+                <a:tint val="80000"/>
+                <a:satMod val="300000"/>
+              </a:schemeClr>
+            </a:gs>
+            <a:gs pos="100000">
+              <a:schemeClr val="phClr">
+                <a:shade val="30000"/>
+                <a:satMod val="200000"/>
+              </a:schemeClr>
+            </a:gs>
+          </a:gsLst>
+          <a:path path="circle">
+            <a:fillToRect l="50000" t="50000" r="50000" b="50000"/>
+          </a:path>
+        </a:gradFill>
+      </a:bgFillStyleLst>
+    </a:fmtScheme>
+  </a:themeElements>
+  <a:objectDefaults>
+    <a:spDef>
+      <a:spPr/>
+      <a:bodyPr/>
+      <a:lstStyle/>
+      <a:style>
+        <a:lnRef idx="1">
+          <a:schemeClr val="accent1"/>
+        </a:lnRef>
+        <a:fillRef idx="3">
+          <a:schemeClr val="accent1"/>
+        </a:fillRef>
+        <a:effectRef idx="2">
+          <a:schemeClr val="accent1"/>
+        </a:effectRef>
+        <a:fontRef idx="minor">
+          <a:schemeClr val="lt1"/>
+        </a:fontRef>
+      </a:style>
+    </a:spDef>
+    <a:lnDef>
+      <a:spPr/>
+      <a:bodyPr/>
+      <a:lstStyle/>
+      <a:style>
+        <a:lnRef idx="2">
+          <a:schemeClr val="accent1"/>
+        </a:lnRef>
+        <a:fillRef idx="0">
+          <a:schemeClr val="accent1"/>
+        </a:fillRef>
+        <a:effectRef idx="1">
+          <a:schemeClr val="accent1"/>
+        </a:effectRef>
+        <a:fontRef idx="minor">
+          <a:schemeClr val="tx1"/>
+        </a:fontRef>
+      </a:style>
+    </a:lnDef>
+  </a:objectDefaults>
+  <a:extraClrSchemeLst/>
+</a:theme>
 </file>